--- a/exports/pptx/lessons/middle-module-01-what-is-iks/day-06-mathematics.pptx
+++ b/exports/pptx/lessons/middle-module-01-what-is-iks/day-06-mathematics.pptx
@@ -18,9 +18,16 @@
     <p:sldId id="266" r:id="rId12"/>
     <p:sldId id="267" r:id="rId13"/>
     <p:sldId id="268" r:id="rId14"/>
+    <p:sldId id="269" r:id="rId15"/>
+    <p:sldId id="270" r:id="rId16"/>
+    <p:sldId id="271" r:id="rId17"/>
+    <p:sldId id="272" r:id="rId18"/>
+    <p:sldId id="273" r:id="rId19"/>
+    <p:sldId id="274" r:id="rId20"/>
+    <p:sldId id="275" r:id="rId21"/>
   </p:sldIdLst>
   <p:notesMasterIdLst>
-    <p:notesMasterId r:id="rId15"/>
+    <p:notesMasterId r:id="rId22"/>
   </p:notesMasterIdLst>
   <p:sldSz cx="9144000" cy="5143500"/>
   <p:notesSz cx="5143500" cy="9144000"/>
@@ -908,6 +915,534 @@
 </p:notes>
 </file>
 
+<file path=ppt/notesSlides/notesSlide14.xml><?xml version="1.0" encoding="utf-8"?>
+<p:notes xmlns:a="http://schemas.openxmlformats.org/drawingml/2006/main" xmlns:r="http://schemas.openxmlformats.org/officeDocument/2006/relationships" xmlns:p="http://schemas.openxmlformats.org/presentationml/2006/main">
+  <p:cSld>
+    <p:spTree>
+      <p:nvGrpSpPr>
+        <p:cNvPr id="1" name=""/>
+        <p:cNvGrpSpPr/>
+        <p:nvPr/>
+      </p:nvGrpSpPr>
+      <p:grpSpPr>
+        <a:xfrm>
+          <a:off x="0" y="0"/>
+          <a:ext cx="0" cy="0"/>
+          <a:chOff x="0" y="0"/>
+          <a:chExt cx="0" cy="0"/>
+        </a:xfrm>
+      </p:grpSpPr>
+      <p:sp>
+        <p:nvSpPr>
+          <p:cNvPr id="2" name="Slide Image Placeholder 1"/>
+          <p:cNvSpPr>
+            <a:spLocks noGrp="1" noRot="1" noChangeAspect="1"/>
+          </p:cNvSpPr>
+          <p:nvPr>
+            <p:ph type="sldImg"/>
+          </p:nvPr>
+        </p:nvSpPr>
+        <p:spPr/>
+      </p:sp>
+      <p:sp>
+        <p:nvSpPr>
+          <p:cNvPr id="3" name="Notes Placeholder 2"/>
+          <p:cNvSpPr>
+            <a:spLocks noGrp="1"/>
+          </p:cNvSpPr>
+          <p:nvPr>
+            <p:ph type="body" idx="1"/>
+          </p:nvPr>
+        </p:nvSpPr>
+        <p:spPr/>
+        <p:txBody>
+          <a:bodyPr/>
+          <a:lstStyle/>
+          <a:p>
+            <a:r>
+              <a:rPr lang="en-US" dirty="0"/>
+              <a:t/>
+            </a:r>
+            <a:endParaRPr lang="en-US" dirty="0"/>
+          </a:p>
+        </p:txBody>
+      </p:sp>
+      <p:sp>
+        <p:nvSpPr>
+          <p:cNvPr id="4" name="Slide Number Placeholder 3"/>
+          <p:cNvSpPr>
+            <a:spLocks noGrp="1"/>
+          </p:cNvSpPr>
+          <p:nvPr>
+            <p:ph type="sldNum" sz="quarter" idx="10"/>
+          </p:nvPr>
+        </p:nvSpPr>
+        <p:spPr/>
+        <p:txBody>
+          <a:bodyPr/>
+          <a:lstStyle/>
+          <a:p>
+            <a:fld id="{F7021451-1387-4CA6-816F-3879F97B5CBC}" type="slidenum">
+              <a:rPr lang="en-US"/>
+              <a:t>14</a:t>
+            </a:fld>
+            <a:endParaRPr lang="en-US"/>
+          </a:p>
+        </p:txBody>
+      </p:sp>
+    </p:spTree>
+    <p:extLst>
+      <p:ext uri="{BB962C8B-B14F-4D97-AF65-F5344CB8AC3E}">
+        <p14:creationId xmlns:p14="http://schemas.microsoft.com/office/powerpoint/2010/main" val="1024086991"/>
+      </p:ext>
+    </p:extLst>
+  </p:cSld>
+  <p:clrMapOvr>
+    <a:masterClrMapping/>
+  </p:clrMapOvr>
+</p:notes>
+</file>
+
+<file path=ppt/notesSlides/notesSlide15.xml><?xml version="1.0" encoding="utf-8"?>
+<p:notes xmlns:a="http://schemas.openxmlformats.org/drawingml/2006/main" xmlns:r="http://schemas.openxmlformats.org/officeDocument/2006/relationships" xmlns:p="http://schemas.openxmlformats.org/presentationml/2006/main">
+  <p:cSld>
+    <p:spTree>
+      <p:nvGrpSpPr>
+        <p:cNvPr id="1" name=""/>
+        <p:cNvGrpSpPr/>
+        <p:nvPr/>
+      </p:nvGrpSpPr>
+      <p:grpSpPr>
+        <a:xfrm>
+          <a:off x="0" y="0"/>
+          <a:ext cx="0" cy="0"/>
+          <a:chOff x="0" y="0"/>
+          <a:chExt cx="0" cy="0"/>
+        </a:xfrm>
+      </p:grpSpPr>
+      <p:sp>
+        <p:nvSpPr>
+          <p:cNvPr id="2" name="Slide Image Placeholder 1"/>
+          <p:cNvSpPr>
+            <a:spLocks noGrp="1" noRot="1" noChangeAspect="1"/>
+          </p:cNvSpPr>
+          <p:nvPr>
+            <p:ph type="sldImg"/>
+          </p:nvPr>
+        </p:nvSpPr>
+        <p:spPr/>
+      </p:sp>
+      <p:sp>
+        <p:nvSpPr>
+          <p:cNvPr id="3" name="Notes Placeholder 2"/>
+          <p:cNvSpPr>
+            <a:spLocks noGrp="1"/>
+          </p:cNvSpPr>
+          <p:nvPr>
+            <p:ph type="body" idx="1"/>
+          </p:nvPr>
+        </p:nvSpPr>
+        <p:spPr/>
+        <p:txBody>
+          <a:bodyPr/>
+          <a:lstStyle/>
+          <a:p>
+            <a:r>
+              <a:rPr lang="en-US" dirty="0"/>
+              <a:t/>
+            </a:r>
+            <a:endParaRPr lang="en-US" dirty="0"/>
+          </a:p>
+        </p:txBody>
+      </p:sp>
+      <p:sp>
+        <p:nvSpPr>
+          <p:cNvPr id="4" name="Slide Number Placeholder 3"/>
+          <p:cNvSpPr>
+            <a:spLocks noGrp="1"/>
+          </p:cNvSpPr>
+          <p:nvPr>
+            <p:ph type="sldNum" sz="quarter" idx="10"/>
+          </p:nvPr>
+        </p:nvSpPr>
+        <p:spPr/>
+        <p:txBody>
+          <a:bodyPr/>
+          <a:lstStyle/>
+          <a:p>
+            <a:fld id="{F7021451-1387-4CA6-816F-3879F97B5CBC}" type="slidenum">
+              <a:rPr lang="en-US"/>
+              <a:t>15</a:t>
+            </a:fld>
+            <a:endParaRPr lang="en-US"/>
+          </a:p>
+        </p:txBody>
+      </p:sp>
+    </p:spTree>
+    <p:extLst>
+      <p:ext uri="{BB962C8B-B14F-4D97-AF65-F5344CB8AC3E}">
+        <p14:creationId xmlns:p14="http://schemas.microsoft.com/office/powerpoint/2010/main" val="1024086991"/>
+      </p:ext>
+    </p:extLst>
+  </p:cSld>
+  <p:clrMapOvr>
+    <a:masterClrMapping/>
+  </p:clrMapOvr>
+</p:notes>
+</file>
+
+<file path=ppt/notesSlides/notesSlide16.xml><?xml version="1.0" encoding="utf-8"?>
+<p:notes xmlns:a="http://schemas.openxmlformats.org/drawingml/2006/main" xmlns:r="http://schemas.openxmlformats.org/officeDocument/2006/relationships" xmlns:p="http://schemas.openxmlformats.org/presentationml/2006/main">
+  <p:cSld>
+    <p:spTree>
+      <p:nvGrpSpPr>
+        <p:cNvPr id="1" name=""/>
+        <p:cNvGrpSpPr/>
+        <p:nvPr/>
+      </p:nvGrpSpPr>
+      <p:grpSpPr>
+        <a:xfrm>
+          <a:off x="0" y="0"/>
+          <a:ext cx="0" cy="0"/>
+          <a:chOff x="0" y="0"/>
+          <a:chExt cx="0" cy="0"/>
+        </a:xfrm>
+      </p:grpSpPr>
+      <p:sp>
+        <p:nvSpPr>
+          <p:cNvPr id="2" name="Slide Image Placeholder 1"/>
+          <p:cNvSpPr>
+            <a:spLocks noGrp="1" noRot="1" noChangeAspect="1"/>
+          </p:cNvSpPr>
+          <p:nvPr>
+            <p:ph type="sldImg"/>
+          </p:nvPr>
+        </p:nvSpPr>
+        <p:spPr/>
+      </p:sp>
+      <p:sp>
+        <p:nvSpPr>
+          <p:cNvPr id="3" name="Notes Placeholder 2"/>
+          <p:cNvSpPr>
+            <a:spLocks noGrp="1"/>
+          </p:cNvSpPr>
+          <p:nvPr>
+            <p:ph type="body" idx="1"/>
+          </p:nvPr>
+        </p:nvSpPr>
+        <p:spPr/>
+        <p:txBody>
+          <a:bodyPr/>
+          <a:lstStyle/>
+          <a:p>
+            <a:r>
+              <a:rPr lang="en-US" dirty="0"/>
+              <a:t/>
+            </a:r>
+            <a:endParaRPr lang="en-US" dirty="0"/>
+          </a:p>
+        </p:txBody>
+      </p:sp>
+      <p:sp>
+        <p:nvSpPr>
+          <p:cNvPr id="4" name="Slide Number Placeholder 3"/>
+          <p:cNvSpPr>
+            <a:spLocks noGrp="1"/>
+          </p:cNvSpPr>
+          <p:nvPr>
+            <p:ph type="sldNum" sz="quarter" idx="10"/>
+          </p:nvPr>
+        </p:nvSpPr>
+        <p:spPr/>
+        <p:txBody>
+          <a:bodyPr/>
+          <a:lstStyle/>
+          <a:p>
+            <a:fld id="{F7021451-1387-4CA6-816F-3879F97B5CBC}" type="slidenum">
+              <a:rPr lang="en-US"/>
+              <a:t>16</a:t>
+            </a:fld>
+            <a:endParaRPr lang="en-US"/>
+          </a:p>
+        </p:txBody>
+      </p:sp>
+    </p:spTree>
+    <p:extLst>
+      <p:ext uri="{BB962C8B-B14F-4D97-AF65-F5344CB8AC3E}">
+        <p14:creationId xmlns:p14="http://schemas.microsoft.com/office/powerpoint/2010/main" val="1024086991"/>
+      </p:ext>
+    </p:extLst>
+  </p:cSld>
+  <p:clrMapOvr>
+    <a:masterClrMapping/>
+  </p:clrMapOvr>
+</p:notes>
+</file>
+
+<file path=ppt/notesSlides/notesSlide17.xml><?xml version="1.0" encoding="utf-8"?>
+<p:notes xmlns:a="http://schemas.openxmlformats.org/drawingml/2006/main" xmlns:r="http://schemas.openxmlformats.org/officeDocument/2006/relationships" xmlns:p="http://schemas.openxmlformats.org/presentationml/2006/main">
+  <p:cSld>
+    <p:spTree>
+      <p:nvGrpSpPr>
+        <p:cNvPr id="1" name=""/>
+        <p:cNvGrpSpPr/>
+        <p:nvPr/>
+      </p:nvGrpSpPr>
+      <p:grpSpPr>
+        <a:xfrm>
+          <a:off x="0" y="0"/>
+          <a:ext cx="0" cy="0"/>
+          <a:chOff x="0" y="0"/>
+          <a:chExt cx="0" cy="0"/>
+        </a:xfrm>
+      </p:grpSpPr>
+      <p:sp>
+        <p:nvSpPr>
+          <p:cNvPr id="2" name="Slide Image Placeholder 1"/>
+          <p:cNvSpPr>
+            <a:spLocks noGrp="1" noRot="1" noChangeAspect="1"/>
+          </p:cNvSpPr>
+          <p:nvPr>
+            <p:ph type="sldImg"/>
+          </p:nvPr>
+        </p:nvSpPr>
+        <p:spPr/>
+      </p:sp>
+      <p:sp>
+        <p:nvSpPr>
+          <p:cNvPr id="3" name="Notes Placeholder 2"/>
+          <p:cNvSpPr>
+            <a:spLocks noGrp="1"/>
+          </p:cNvSpPr>
+          <p:nvPr>
+            <p:ph type="body" idx="1"/>
+          </p:nvPr>
+        </p:nvSpPr>
+        <p:spPr/>
+        <p:txBody>
+          <a:bodyPr/>
+          <a:lstStyle/>
+          <a:p>
+            <a:r>
+              <a:rPr lang="en-US" dirty="0"/>
+              <a:t/>
+            </a:r>
+            <a:endParaRPr lang="en-US" dirty="0"/>
+          </a:p>
+        </p:txBody>
+      </p:sp>
+      <p:sp>
+        <p:nvSpPr>
+          <p:cNvPr id="4" name="Slide Number Placeholder 3"/>
+          <p:cNvSpPr>
+            <a:spLocks noGrp="1"/>
+          </p:cNvSpPr>
+          <p:nvPr>
+            <p:ph type="sldNum" sz="quarter" idx="10"/>
+          </p:nvPr>
+        </p:nvSpPr>
+        <p:spPr/>
+        <p:txBody>
+          <a:bodyPr/>
+          <a:lstStyle/>
+          <a:p>
+            <a:fld id="{F7021451-1387-4CA6-816F-3879F97B5CBC}" type="slidenum">
+              <a:rPr lang="en-US"/>
+              <a:t>17</a:t>
+            </a:fld>
+            <a:endParaRPr lang="en-US"/>
+          </a:p>
+        </p:txBody>
+      </p:sp>
+    </p:spTree>
+    <p:extLst>
+      <p:ext uri="{BB962C8B-B14F-4D97-AF65-F5344CB8AC3E}">
+        <p14:creationId xmlns:p14="http://schemas.microsoft.com/office/powerpoint/2010/main" val="1024086991"/>
+      </p:ext>
+    </p:extLst>
+  </p:cSld>
+  <p:clrMapOvr>
+    <a:masterClrMapping/>
+  </p:clrMapOvr>
+</p:notes>
+</file>
+
+<file path=ppt/notesSlides/notesSlide18.xml><?xml version="1.0" encoding="utf-8"?>
+<p:notes xmlns:a="http://schemas.openxmlformats.org/drawingml/2006/main" xmlns:r="http://schemas.openxmlformats.org/officeDocument/2006/relationships" xmlns:p="http://schemas.openxmlformats.org/presentationml/2006/main">
+  <p:cSld>
+    <p:spTree>
+      <p:nvGrpSpPr>
+        <p:cNvPr id="1" name=""/>
+        <p:cNvGrpSpPr/>
+        <p:nvPr/>
+      </p:nvGrpSpPr>
+      <p:grpSpPr>
+        <a:xfrm>
+          <a:off x="0" y="0"/>
+          <a:ext cx="0" cy="0"/>
+          <a:chOff x="0" y="0"/>
+          <a:chExt cx="0" cy="0"/>
+        </a:xfrm>
+      </p:grpSpPr>
+      <p:sp>
+        <p:nvSpPr>
+          <p:cNvPr id="2" name="Slide Image Placeholder 1"/>
+          <p:cNvSpPr>
+            <a:spLocks noGrp="1" noRot="1" noChangeAspect="1"/>
+          </p:cNvSpPr>
+          <p:nvPr>
+            <p:ph type="sldImg"/>
+          </p:nvPr>
+        </p:nvSpPr>
+        <p:spPr/>
+      </p:sp>
+      <p:sp>
+        <p:nvSpPr>
+          <p:cNvPr id="3" name="Notes Placeholder 2"/>
+          <p:cNvSpPr>
+            <a:spLocks noGrp="1"/>
+          </p:cNvSpPr>
+          <p:nvPr>
+            <p:ph type="body" idx="1"/>
+          </p:nvPr>
+        </p:nvSpPr>
+        <p:spPr/>
+        <p:txBody>
+          <a:bodyPr/>
+          <a:lstStyle/>
+          <a:p>
+            <a:r>
+              <a:rPr lang="en-US" dirty="0"/>
+              <a:t/>
+            </a:r>
+            <a:endParaRPr lang="en-US" dirty="0"/>
+          </a:p>
+        </p:txBody>
+      </p:sp>
+      <p:sp>
+        <p:nvSpPr>
+          <p:cNvPr id="4" name="Slide Number Placeholder 3"/>
+          <p:cNvSpPr>
+            <a:spLocks noGrp="1"/>
+          </p:cNvSpPr>
+          <p:nvPr>
+            <p:ph type="sldNum" sz="quarter" idx="10"/>
+          </p:nvPr>
+        </p:nvSpPr>
+        <p:spPr/>
+        <p:txBody>
+          <a:bodyPr/>
+          <a:lstStyle/>
+          <a:p>
+            <a:fld id="{F7021451-1387-4CA6-816F-3879F97B5CBC}" type="slidenum">
+              <a:rPr lang="en-US"/>
+              <a:t>18</a:t>
+            </a:fld>
+            <a:endParaRPr lang="en-US"/>
+          </a:p>
+        </p:txBody>
+      </p:sp>
+    </p:spTree>
+    <p:extLst>
+      <p:ext uri="{BB962C8B-B14F-4D97-AF65-F5344CB8AC3E}">
+        <p14:creationId xmlns:p14="http://schemas.microsoft.com/office/powerpoint/2010/main" val="1024086991"/>
+      </p:ext>
+    </p:extLst>
+  </p:cSld>
+  <p:clrMapOvr>
+    <a:masterClrMapping/>
+  </p:clrMapOvr>
+</p:notes>
+</file>
+
+<file path=ppt/notesSlides/notesSlide19.xml><?xml version="1.0" encoding="utf-8"?>
+<p:notes xmlns:a="http://schemas.openxmlformats.org/drawingml/2006/main" xmlns:r="http://schemas.openxmlformats.org/officeDocument/2006/relationships" xmlns:p="http://schemas.openxmlformats.org/presentationml/2006/main">
+  <p:cSld>
+    <p:spTree>
+      <p:nvGrpSpPr>
+        <p:cNvPr id="1" name=""/>
+        <p:cNvGrpSpPr/>
+        <p:nvPr/>
+      </p:nvGrpSpPr>
+      <p:grpSpPr>
+        <a:xfrm>
+          <a:off x="0" y="0"/>
+          <a:ext cx="0" cy="0"/>
+          <a:chOff x="0" y="0"/>
+          <a:chExt cx="0" cy="0"/>
+        </a:xfrm>
+      </p:grpSpPr>
+      <p:sp>
+        <p:nvSpPr>
+          <p:cNvPr id="2" name="Slide Image Placeholder 1"/>
+          <p:cNvSpPr>
+            <a:spLocks noGrp="1" noRot="1" noChangeAspect="1"/>
+          </p:cNvSpPr>
+          <p:nvPr>
+            <p:ph type="sldImg"/>
+          </p:nvPr>
+        </p:nvSpPr>
+        <p:spPr/>
+      </p:sp>
+      <p:sp>
+        <p:nvSpPr>
+          <p:cNvPr id="3" name="Notes Placeholder 2"/>
+          <p:cNvSpPr>
+            <a:spLocks noGrp="1"/>
+          </p:cNvSpPr>
+          <p:nvPr>
+            <p:ph type="body" idx="1"/>
+          </p:nvPr>
+        </p:nvSpPr>
+        <p:spPr/>
+        <p:txBody>
+          <a:bodyPr/>
+          <a:lstStyle/>
+          <a:p>
+            <a:r>
+              <a:rPr lang="en-US" dirty="0"/>
+              <a:t/>
+            </a:r>
+            <a:endParaRPr lang="en-US" dirty="0"/>
+          </a:p>
+        </p:txBody>
+      </p:sp>
+      <p:sp>
+        <p:nvSpPr>
+          <p:cNvPr id="4" name="Slide Number Placeholder 3"/>
+          <p:cNvSpPr>
+            <a:spLocks noGrp="1"/>
+          </p:cNvSpPr>
+          <p:nvPr>
+            <p:ph type="sldNum" sz="quarter" idx="10"/>
+          </p:nvPr>
+        </p:nvSpPr>
+        <p:spPr/>
+        <p:txBody>
+          <a:bodyPr/>
+          <a:lstStyle/>
+          <a:p>
+            <a:fld id="{F7021451-1387-4CA6-816F-3879F97B5CBC}" type="slidenum">
+              <a:rPr lang="en-US"/>
+              <a:t>19</a:t>
+            </a:fld>
+            <a:endParaRPr lang="en-US"/>
+          </a:p>
+        </p:txBody>
+      </p:sp>
+    </p:spTree>
+    <p:extLst>
+      <p:ext uri="{BB962C8B-B14F-4D97-AF65-F5344CB8AC3E}">
+        <p14:creationId xmlns:p14="http://schemas.microsoft.com/office/powerpoint/2010/main" val="1024086991"/>
+      </p:ext>
+    </p:extLst>
+  </p:cSld>
+  <p:clrMapOvr>
+    <a:masterClrMapping/>
+  </p:clrMapOvr>
+</p:notes>
+</file>
+
 <file path=ppt/notesSlides/notesSlide2.xml><?xml version="1.0" encoding="utf-8"?>
 <p:notes xmlns:a="http://schemas.openxmlformats.org/drawingml/2006/main" xmlns:r="http://schemas.openxmlformats.org/officeDocument/2006/relationships" xmlns:p="http://schemas.openxmlformats.org/presentationml/2006/main">
   <p:cSld>
@@ -978,6 +1513,94 @@
             <a:fld id="{F7021451-1387-4CA6-816F-3879F97B5CBC}" type="slidenum">
               <a:rPr lang="en-US"/>
               <a:t>2</a:t>
+            </a:fld>
+            <a:endParaRPr lang="en-US"/>
+          </a:p>
+        </p:txBody>
+      </p:sp>
+    </p:spTree>
+    <p:extLst>
+      <p:ext uri="{BB962C8B-B14F-4D97-AF65-F5344CB8AC3E}">
+        <p14:creationId xmlns:p14="http://schemas.microsoft.com/office/powerpoint/2010/main" val="1024086991"/>
+      </p:ext>
+    </p:extLst>
+  </p:cSld>
+  <p:clrMapOvr>
+    <a:masterClrMapping/>
+  </p:clrMapOvr>
+</p:notes>
+</file>
+
+<file path=ppt/notesSlides/notesSlide20.xml><?xml version="1.0" encoding="utf-8"?>
+<p:notes xmlns:a="http://schemas.openxmlformats.org/drawingml/2006/main" xmlns:r="http://schemas.openxmlformats.org/officeDocument/2006/relationships" xmlns:p="http://schemas.openxmlformats.org/presentationml/2006/main">
+  <p:cSld>
+    <p:spTree>
+      <p:nvGrpSpPr>
+        <p:cNvPr id="1" name=""/>
+        <p:cNvGrpSpPr/>
+        <p:nvPr/>
+      </p:nvGrpSpPr>
+      <p:grpSpPr>
+        <a:xfrm>
+          <a:off x="0" y="0"/>
+          <a:ext cx="0" cy="0"/>
+          <a:chOff x="0" y="0"/>
+          <a:chExt cx="0" cy="0"/>
+        </a:xfrm>
+      </p:grpSpPr>
+      <p:sp>
+        <p:nvSpPr>
+          <p:cNvPr id="2" name="Slide Image Placeholder 1"/>
+          <p:cNvSpPr>
+            <a:spLocks noGrp="1" noRot="1" noChangeAspect="1"/>
+          </p:cNvSpPr>
+          <p:nvPr>
+            <p:ph type="sldImg"/>
+          </p:nvPr>
+        </p:nvSpPr>
+        <p:spPr/>
+      </p:sp>
+      <p:sp>
+        <p:nvSpPr>
+          <p:cNvPr id="3" name="Notes Placeholder 2"/>
+          <p:cNvSpPr>
+            <a:spLocks noGrp="1"/>
+          </p:cNvSpPr>
+          <p:nvPr>
+            <p:ph type="body" idx="1"/>
+          </p:nvPr>
+        </p:nvSpPr>
+        <p:spPr/>
+        <p:txBody>
+          <a:bodyPr/>
+          <a:lstStyle/>
+          <a:p>
+            <a:r>
+              <a:rPr lang="en-US" dirty="0"/>
+              <a:t/>
+            </a:r>
+            <a:endParaRPr lang="en-US" dirty="0"/>
+          </a:p>
+        </p:txBody>
+      </p:sp>
+      <p:sp>
+        <p:nvSpPr>
+          <p:cNvPr id="4" name="Slide Number Placeholder 3"/>
+          <p:cNvSpPr>
+            <a:spLocks noGrp="1"/>
+          </p:cNvSpPr>
+          <p:nvPr>
+            <p:ph type="sldNum" sz="quarter" idx="10"/>
+          </p:nvPr>
+        </p:nvSpPr>
+        <p:spPr/>
+        <p:txBody>
+          <a:bodyPr/>
+          <a:lstStyle/>
+          <a:p>
+            <a:fld id="{F7021451-1387-4CA6-816F-3879F97B5CBC}" type="slidenum">
+              <a:rPr lang="en-US"/>
+              <a:t>20</a:t>
             </a:fld>
             <a:endParaRPr lang="en-US"/>
           </a:p>
@@ -2143,102 +2766,6 @@
         </p:nvSpPr>
         <p:spPr>
           <a:xfrm>
-            <a:off x="406301" y="1223963"/>
-            <a:ext cx="8498026" cy="274290"/>
-          </a:xfrm>
-          <a:prstGeom prst="rect">
-            <a:avLst/>
-          </a:prstGeom>
-          <a:noFill/>
-          <a:ln/>
-        </p:spPr>
-        <p:txBody>
-          <a:bodyPr wrap="square" lIns="0" tIns="0" rIns="0" bIns="0" rtlCol="0" anchor="t"/>
-          <a:lstStyle/>
-          <a:p>
-            <a:pPr algn="l" indent="0" marL="0">
-              <a:lnSpc>
-                <a:spcPts val="2160"/>
-              </a:lnSpc>
-              <a:spcBef>
-                <a:spcPts val="600"/>
-              </a:spcBef>
-              <a:spcAft>
-                <a:spcPts val="800"/>
-              </a:spcAft>
-              <a:buNone/>
-            </a:pPr>
-            <a:r>
-              <a:rPr lang="en-US" sz="1800" b="1" dirty="0">
-                <a:solidFill>
-                  <a:srgbClr val="FE4447"/>
-                </a:solidFill>
-                <a:latin typeface="Georgia" pitchFamily="34" charset="0"/>
-                <a:ea typeface="Georgia" pitchFamily="34" charset="-122"/>
-                <a:cs typeface="Georgia" pitchFamily="34" charset="-120"/>
-              </a:rPr>
-              <a:t>Learning objective</a:t>
-            </a:r>
-            <a:endParaRPr lang="en-US" sz="1800" dirty="0"/>
-          </a:p>
-        </p:txBody>
-      </p:sp>
-      <p:sp>
-        <p:nvSpPr>
-          <p:cNvPr id="6" name="Text 4"/>
-          <p:cNvSpPr/>
-          <p:nvPr/>
-        </p:nvSpPr>
-        <p:spPr>
-          <a:xfrm>
-            <a:off x="406301" y="1637854"/>
-            <a:ext cx="8498026" cy="213271"/>
-          </a:xfrm>
-          <a:prstGeom prst="rect">
-            <a:avLst/>
-          </a:prstGeom>
-          <a:noFill/>
-          <a:ln/>
-        </p:spPr>
-        <p:txBody>
-          <a:bodyPr wrap="square" lIns="0" tIns="0" rIns="0" bIns="0" rtlCol="0" anchor="t"/>
-          <a:lstStyle/>
-          <a:p>
-            <a:pPr algn="l" indent="0" marL="0">
-              <a:lnSpc>
-                <a:spcPts val="1680"/>
-              </a:lnSpc>
-              <a:spcBef>
-                <a:spcPts val="300"/>
-              </a:spcBef>
-              <a:spcAft>
-                <a:spcPts val="300"/>
-              </a:spcAft>
-              <a:buNone/>
-            </a:pPr>
-            <a:r>
-              <a:rPr lang="en-US" sz="1200" dirty="0">
-                <a:solidFill>
-                  <a:srgbClr val="1C2833"/>
-                </a:solidFill>
-                <a:latin typeface="Arial" pitchFamily="34" charset="0"/>
-                <a:ea typeface="Arial" pitchFamily="34" charset="-122"/>
-                <a:cs typeface="Arial" pitchFamily="34" charset="-120"/>
-              </a:rPr>
-              <a:t>Students name 3 specific Indian mathematical contributions with dates and articulate why each matters.</a:t>
-            </a:r>
-            <a:endParaRPr lang="en-US" sz="1200" dirty="0"/>
-          </a:p>
-        </p:txBody>
-      </p:sp>
-      <p:sp>
-        <p:nvSpPr>
-          <p:cNvPr id="7" name="Text 5"/>
-          <p:cNvSpPr/>
-          <p:nvPr/>
-        </p:nvSpPr>
-        <p:spPr>
-          <a:xfrm>
             <a:off x="406301" y="4434929"/>
             <a:ext cx="8498026" cy="213271"/>
           </a:xfrm>
@@ -2383,7 +2910,7 @@
                 <a:ea typeface="Georgia" pitchFamily="34" charset="-122"/>
                 <a:cs typeface="Georgia" pitchFamily="34" charset="-120"/>
               </a:rPr>
-              <a:t>Homework</a:t>
+              <a:t>Core (25 min) (cont.)</a:t>
             </a:r>
             <a:endParaRPr lang="en-US" sz="1800" dirty="0"/>
           </a:p>
@@ -2397,8 +2924,8 @@
         </p:nvSpPr>
         <p:spPr>
           <a:xfrm>
-            <a:off x="406301" y="870942"/>
-            <a:ext cx="8498026" cy="213271"/>
+            <a:off x="634901" y="883593"/>
+            <a:ext cx="8102798" cy="693241"/>
           </a:xfrm>
           <a:prstGeom prst="rect">
             <a:avLst/>
@@ -2410,20 +2937,27 @@
           <a:bodyPr wrap="square" lIns="0" tIns="0" rIns="0" bIns="0" rtlCol="0" anchor="t"/>
           <a:lstStyle/>
           <a:p>
+            <a:pPr algn="l" marL="342900" indent="-342900">
+              <a:lnSpc>
+                <a:spcPts val="1620"/>
+              </a:lnSpc>
+              <a:spcAft>
+                <a:spcPts val="300"/>
+              </a:spcAft>
+              <a:buSzPct val="100000"/>
+              <a:buChar char="•"/>
+            </a:pPr>
             <a:pPr algn="l" indent="0" marL="0">
               <a:lnSpc>
-                <a:spcPts val="1680"/>
-              </a:lnSpc>
-              <a:spcBef>
-                <a:spcPts val="300"/>
-              </a:spcBef>
-              <a:spcAft>
-                <a:spcPts val="300"/>
-              </a:spcAft>
-              <a:buNone/>
-            </a:pPr>
-            <a:r>
-              <a:rPr lang="en-US" sz="1200" dirty="0">
+                <a:spcPts val="1620"/>
+              </a:lnSpc>
+              <a:spcAft>
+                <a:spcPts val="300"/>
+              </a:spcAft>
+              <a:buNone/>
+            </a:pPr>
+            <a:r>
+              <a:rPr lang="en-US" sz="1200" i="1" dirty="0">
                 <a:solidFill>
                   <a:srgbClr val="1C2833"/>
                 </a:solidFill>
@@ -2431,7 +2965,67 @@
                 <a:ea typeface="Arial" pitchFamily="34" charset="-122"/>
                 <a:cs typeface="Arial" pitchFamily="34" charset="-120"/>
               </a:rPr>
-              <a:t>– Compute 10 terms of the Mādhava series for π. How close do you get?</a:t>
+              <a:t>A named text — Bhāskara II's</a:t>
+            </a:r>
+            <a:pPr algn="l" indent="0" marL="0">
+              <a:lnSpc>
+                <a:spcPts val="1620"/>
+              </a:lnSpc>
+              <a:spcAft>
+                <a:spcPts val="300"/>
+              </a:spcAft>
+              <a:buNone/>
+            </a:pPr>
+            <a:r>
+              <a:rPr lang="en-US" sz="1200" dirty="0">
+                <a:solidFill>
+                  <a:srgbClr val="1C2833"/>
+                </a:solidFill>
+                <a:latin typeface="Arial" pitchFamily="34" charset="0"/>
+                <a:ea typeface="Arial" pitchFamily="34" charset="-122"/>
+                <a:cs typeface="Arial" pitchFamily="34" charset="-120"/>
+              </a:rPr>
+              <a:t>Līlāvatī</a:t>
+            </a:r>
+            <a:pPr algn="l" indent="0" marL="0">
+              <a:lnSpc>
+                <a:spcPts val="1620"/>
+              </a:lnSpc>
+              <a:spcAft>
+                <a:spcPts val="300"/>
+              </a:spcAft>
+              <a:buNone/>
+            </a:pPr>
+            <a:r>
+              <a:rPr lang="en-US" sz="1200" i="1" dirty="0">
+                <a:solidFill>
+                  <a:srgbClr val="1C2833"/>
+                </a:solidFill>
+                <a:latin typeface="Arial" pitchFamily="34" charset="0"/>
+                <a:ea typeface="Arial" pitchFamily="34" charset="-122"/>
+                <a:cs typeface="Arial" pitchFamily="34" charset="-120"/>
+              </a:rPr>
+              <a:t> (1150 CE).</a:t>
+            </a:r>
+            <a:pPr algn="l" indent="0" marL="0">
+              <a:lnSpc>
+                <a:spcPts val="1620"/>
+              </a:lnSpc>
+              <a:spcAft>
+                <a:spcPts val="300"/>
+              </a:spcAft>
+              <a:buNone/>
+            </a:pPr>
+            <a:r>
+              <a:rPr lang="en-US" sz="1200" dirty="0">
+                <a:solidFill>
+                  <a:srgbClr val="1C2833"/>
+                </a:solidFill>
+                <a:latin typeface="Arial" pitchFamily="34" charset="0"/>
+                <a:ea typeface="Arial" pitchFamily="34" charset="-122"/>
+                <a:cs typeface="Arial" pitchFamily="34" charset="-120"/>
+              </a:rPr>
+              <a:t>* A textbook on arithmetic and algebra written for his daughter (the name "Līlāvatī" is reportedly hers). Includes problems on geometry, sequences, equations, mensuration. Read one short problem aloud (in translation).</a:t>
             </a:r>
             <a:endParaRPr lang="en-US" sz="1200" dirty="0"/>
           </a:p>
@@ -2589,7 +3183,7 @@
                 <a:ea typeface="Georgia" pitchFamily="34" charset="-122"/>
                 <a:cs typeface="Georgia" pitchFamily="34" charset="-120"/>
               </a:rPr>
-              <a:t>Differentiation</a:t>
+              <a:t>Core (25 min) (cont.)</a:t>
             </a:r>
             <a:endParaRPr lang="en-US" sz="1800" dirty="0"/>
           </a:p>
@@ -2604,7 +3198,7 @@
         <p:spPr>
           <a:xfrm>
             <a:off x="634901" y="883593"/>
-            <a:ext cx="8102798" cy="525661"/>
+            <a:ext cx="8102798" cy="281880"/>
           </a:xfrm>
           <a:prstGeom prst="rect">
             <a:avLst/>
@@ -2635,16 +3229,42 @@
                 <a:ea typeface="Arial" pitchFamily="34" charset="-122"/>
                 <a:cs typeface="Arial" pitchFamily="34" charset="-120"/>
               </a:rPr>
-              <a:t>Tier up:</a:t>
-            </a:r>
-            <a:pPr algn="l" indent="0" marL="0">
+              <a:t>What modern math doesn't credit Indian sources for (but should):</a:t>
+            </a:r>
+            <a:endParaRPr lang="en-US" sz="1200" dirty="0"/>
+          </a:p>
+        </p:txBody>
+      </p:sp>
+      <p:sp>
+        <p:nvSpPr>
+          <p:cNvPr id="5" name="Text 3"/>
+          <p:cNvSpPr/>
+          <p:nvPr/>
+        </p:nvSpPr>
+        <p:spPr>
+          <a:xfrm>
+            <a:off x="634901" y="1266974"/>
+            <a:ext cx="8102798" cy="769441"/>
+          </a:xfrm>
+          <a:prstGeom prst="rect">
+            <a:avLst/>
+          </a:prstGeom>
+          <a:noFill/>
+          <a:ln/>
+        </p:spPr>
+        <p:txBody>
+          <a:bodyPr wrap="square" lIns="0" tIns="0" rIns="0" bIns="0" rtlCol="0" anchor="t"/>
+          <a:lstStyle/>
+          <a:p>
+            <a:pPr algn="l" marL="342900" indent="-342900">
               <a:lnSpc>
                 <a:spcPts val="1620"/>
               </a:lnSpc>
               <a:spcAft>
                 <a:spcPts val="300"/>
               </a:spcAft>
-              <a:buNone/>
+              <a:buSzPct val="100000"/>
+              <a:buChar char="•"/>
             </a:pPr>
             <a:r>
               <a:rPr lang="en-US" sz="1200" dirty="0">
@@ -2655,7 +3275,7 @@
                 <a:ea typeface="Arial" pitchFamily="34" charset="-122"/>
                 <a:cs typeface="Arial" pitchFamily="34" charset="-120"/>
               </a:rPr>
-              <a:t> Read about the Madhava-Leibniz attribution debate. Why is the European name still standard?</a:t>
+              <a:t>The number zero as a number (not just placeholder).</a:t>
             </a:r>
             <a:endParaRPr lang="en-US" sz="1200" dirty="0"/>
           </a:p>
@@ -2671,7 +3291,7 @@
               <a:buChar char="•"/>
             </a:pPr>
             <a:r>
-              <a:rPr lang="en-US" sz="1200" b="1" dirty="0">
+              <a:rPr lang="en-US" sz="1200" dirty="0">
                 <a:solidFill>
                   <a:srgbClr val="1C2833"/>
                 </a:solidFill>
@@ -2679,16 +3299,20 @@
                 <a:ea typeface="Arial" pitchFamily="34" charset="-122"/>
                 <a:cs typeface="Arial" pitchFamily="34" charset="-120"/>
               </a:rPr>
-              <a:t>Tier down:</a:t>
-            </a:r>
-            <a:pPr algn="l" indent="0" marL="0">
+              <a:t>The "Leibniz" series for π (Mādhava had it).</a:t>
+            </a:r>
+            <a:endParaRPr lang="en-US" sz="1200" dirty="0"/>
+          </a:p>
+          <a:p>
+            <a:pPr algn="l" marL="342900" indent="-342900">
               <a:lnSpc>
                 <a:spcPts val="1620"/>
               </a:lnSpc>
               <a:spcAft>
                 <a:spcPts val="300"/>
               </a:spcAft>
-              <a:buNone/>
+              <a:buSzPct val="100000"/>
+              <a:buChar char="•"/>
             </a:pPr>
             <a:r>
               <a:rPr lang="en-US" sz="1200" dirty="0">
@@ -2699,7 +3323,7 @@
                 <a:ea typeface="Arial" pitchFamily="34" charset="-122"/>
                 <a:cs typeface="Arial" pitchFamily="34" charset="-120"/>
               </a:rPr>
-              <a:t> Just remember the three contributions + their approximate dates.</a:t>
+              <a:t>Several trigonometric identities.</a:t>
             </a:r>
             <a:endParaRPr lang="en-US" sz="1200" dirty="0"/>
           </a:p>
@@ -2707,7 +3331,7 @@
       </p:sp>
       <p:sp>
         <p:nvSpPr>
-          <p:cNvPr id="5" name="Text 3"/>
+          <p:cNvPr id="6" name="Text 4"/>
           <p:cNvSpPr/>
           <p:nvPr/>
         </p:nvSpPr>
@@ -2857,7 +3481,7 @@
                 <a:ea typeface="Georgia" pitchFamily="34" charset="-122"/>
                 <a:cs typeface="Georgia" pitchFamily="34" charset="-120"/>
               </a:rPr>
-              <a:t>Teacher notes</a:t>
+              <a:t>Core (25 min) (cont.)</a:t>
             </a:r>
             <a:endParaRPr lang="en-US" sz="1800" dirty="0"/>
           </a:p>
@@ -2871,8 +3495,8 @@
         </p:nvSpPr>
         <p:spPr>
           <a:xfrm>
-            <a:off x="406301" y="870942"/>
-            <a:ext cx="8498026" cy="639812"/>
+            <a:off x="634901" y="883593"/>
+            <a:ext cx="8102798" cy="281880"/>
           </a:xfrm>
           <a:prstGeom prst="rect">
             <a:avLst/>
@@ -2884,20 +3508,18 @@
           <a:bodyPr wrap="square" lIns="0" tIns="0" rIns="0" bIns="0" rtlCol="0" anchor="t"/>
           <a:lstStyle/>
           <a:p>
-            <a:pPr algn="l" indent="0" marL="0">
-              <a:lnSpc>
-                <a:spcPts val="1680"/>
-              </a:lnSpc>
-              <a:spcBef>
-                <a:spcPts val="300"/>
-              </a:spcBef>
-              <a:spcAft>
-                <a:spcPts val="300"/>
-              </a:spcAft>
-              <a:buNone/>
-            </a:pPr>
-            <a:r>
-              <a:rPr lang="en-US" sz="1200" dirty="0">
+            <a:pPr algn="l" marL="342900" indent="-342900">
+              <a:lnSpc>
+                <a:spcPts val="1620"/>
+              </a:lnSpc>
+              <a:spcAft>
+                <a:spcPts val="300"/>
+              </a:spcAft>
+              <a:buSzPct val="100000"/>
+              <a:buChar char="•"/>
+            </a:pPr>
+            <a:r>
+              <a:rPr lang="en-US" sz="1200" b="1" dirty="0">
                 <a:solidFill>
                   <a:srgbClr val="1C2833"/>
                 </a:solidFill>
@@ -2905,22 +3527,45 @@
                 <a:ea typeface="Arial" pitchFamily="34" charset="-122"/>
                 <a:cs typeface="Arial" pitchFamily="34" charset="-120"/>
               </a:rPr>
-              <a:t>– The Leibniz-Mādhava attribution is a recurring honest-credit issue. Mainstream math history is increasingly correcting this; some textbooks now use "Madhava-Leibniz series." – Bhāskara II's </a:t>
-            </a:r>
-            <a:pPr algn="l" indent="0" marL="0">
-              <a:lnSpc>
-                <a:spcPts val="1680"/>
-              </a:lnSpc>
-              <a:spcBef>
-                <a:spcPts val="300"/>
-              </a:spcBef>
-              <a:spcAft>
-                <a:spcPts val="300"/>
-              </a:spcAft>
-              <a:buNone/>
-            </a:pPr>
-            <a:r>
-              <a:rPr lang="en-US" sz="1200" i="1" dirty="0">
+              <a:t>What Indian math DIDN'T do:</a:t>
+            </a:r>
+            <a:endParaRPr lang="en-US" sz="1200" dirty="0"/>
+          </a:p>
+        </p:txBody>
+      </p:sp>
+      <p:sp>
+        <p:nvSpPr>
+          <p:cNvPr id="5" name="Text 3"/>
+          <p:cNvSpPr/>
+          <p:nvPr/>
+        </p:nvSpPr>
+        <p:spPr>
+          <a:xfrm>
+            <a:off x="634901" y="1266974"/>
+            <a:ext cx="8102798" cy="769441"/>
+          </a:xfrm>
+          <a:prstGeom prst="rect">
+            <a:avLst/>
+          </a:prstGeom>
+          <a:noFill/>
+          <a:ln/>
+        </p:spPr>
+        <p:txBody>
+          <a:bodyPr wrap="square" lIns="0" tIns="0" rIns="0" bIns="0" rtlCol="0" anchor="t"/>
+          <a:lstStyle/>
+          <a:p>
+            <a:pPr algn="l" marL="342900" indent="-342900">
+              <a:lnSpc>
+                <a:spcPts val="1620"/>
+              </a:lnSpc>
+              <a:spcAft>
+                <a:spcPts val="300"/>
+              </a:spcAft>
+              <a:buSzPct val="100000"/>
+              <a:buChar char="•"/>
+            </a:pPr>
+            <a:r>
+              <a:rPr lang="en-US" sz="1200" dirty="0">
                 <a:solidFill>
                   <a:srgbClr val="1C2833"/>
                 </a:solidFill>
@@ -2928,19 +3573,20 @@
                 <a:ea typeface="Arial" pitchFamily="34" charset="-122"/>
                 <a:cs typeface="Arial" pitchFamily="34" charset="-120"/>
               </a:rPr>
-              <a:t>Līlāvatī</a:t>
-            </a:r>
-            <a:pPr algn="l" indent="0" marL="0">
-              <a:lnSpc>
-                <a:spcPts val="1680"/>
-              </a:lnSpc>
-              <a:spcBef>
-                <a:spcPts val="300"/>
-              </a:spcBef>
-              <a:spcAft>
-                <a:spcPts val="300"/>
-              </a:spcAft>
-              <a:buNone/>
+              <a:t>Did not develop full coordinate geometry (that's Descartes, 17th c. European).</a:t>
+            </a:r>
+            <a:endParaRPr lang="en-US" sz="1200" dirty="0"/>
+          </a:p>
+          <a:p>
+            <a:pPr algn="l" marL="342900" indent="-342900">
+              <a:lnSpc>
+                <a:spcPts val="1620"/>
+              </a:lnSpc>
+              <a:spcAft>
+                <a:spcPts val="300"/>
+              </a:spcAft>
+              <a:buSzPct val="100000"/>
+              <a:buChar char="•"/>
             </a:pPr>
             <a:r>
               <a:rPr lang="en-US" sz="1200" dirty="0">
@@ -2951,15 +3597,87 @@
                 <a:ea typeface="Arial" pitchFamily="34" charset="-122"/>
                 <a:cs typeface="Arial" pitchFamily="34" charset="-120"/>
               </a:rPr>
-              <a:t> problems are charming — many are presented as little stories. If time permits, read one or two more.</a:t>
+              <a:t>Did not develop calculus formally (though Mādhava came very close with the series).</a:t>
             </a:r>
             <a:endParaRPr lang="en-US" sz="1200" dirty="0"/>
           </a:p>
-        </p:txBody>
-      </p:sp>
-      <p:sp>
-        <p:nvSpPr>
-          <p:cNvPr id="5" name="Text 3"/>
+          <a:p>
+            <a:pPr algn="l" marL="342900" indent="-342900">
+              <a:lnSpc>
+                <a:spcPts val="1620"/>
+              </a:lnSpc>
+              <a:spcAft>
+                <a:spcPts val="300"/>
+              </a:spcAft>
+              <a:buSzPct val="100000"/>
+              <a:buChar char="•"/>
+            </a:pPr>
+            <a:r>
+              <a:rPr lang="en-US" sz="1200" dirty="0">
+                <a:solidFill>
+                  <a:srgbClr val="1C2833"/>
+                </a:solidFill>
+                <a:latin typeface="Arial" pitchFamily="34" charset="0"/>
+                <a:ea typeface="Arial" pitchFamily="34" charset="-122"/>
+                <a:cs typeface="Arial" pitchFamily="34" charset="-120"/>
+              </a:rPr>
+              <a:t>Did not develop modern algebraic notation.</a:t>
+            </a:r>
+            <a:endParaRPr lang="en-US" sz="1200" dirty="0"/>
+          </a:p>
+        </p:txBody>
+      </p:sp>
+      <p:sp>
+        <p:nvSpPr>
+          <p:cNvPr id="6" name="Text 4"/>
+          <p:cNvSpPr/>
+          <p:nvPr/>
+        </p:nvSpPr>
+        <p:spPr>
+          <a:xfrm>
+            <a:off x="406301" y="2125266"/>
+            <a:ext cx="8498026" cy="213271"/>
+          </a:xfrm>
+          <a:prstGeom prst="rect">
+            <a:avLst/>
+          </a:prstGeom>
+          <a:noFill/>
+          <a:ln/>
+        </p:spPr>
+        <p:txBody>
+          <a:bodyPr wrap="square" lIns="0" tIns="0" rIns="0" bIns="0" rtlCol="0" anchor="t"/>
+          <a:lstStyle/>
+          <a:p>
+            <a:pPr algn="l" indent="0" marL="0">
+              <a:lnSpc>
+                <a:spcPts val="1680"/>
+              </a:lnSpc>
+              <a:spcBef>
+                <a:spcPts val="300"/>
+              </a:spcBef>
+              <a:spcAft>
+                <a:spcPts val="300"/>
+              </a:spcAft>
+              <a:buNone/>
+            </a:pPr>
+            <a:r>
+              <a:rPr lang="en-US" sz="1200" dirty="0">
+                <a:solidFill>
+                  <a:srgbClr val="1C2833"/>
+                </a:solidFill>
+                <a:latin typeface="Arial" pitchFamily="34" charset="0"/>
+                <a:ea typeface="Arial" pitchFamily="34" charset="-122"/>
+                <a:cs typeface="Arial" pitchFamily="34" charset="-120"/>
+              </a:rPr>
+              <a:t>Both lists matter for honesty.</a:t>
+            </a:r>
+            <a:endParaRPr lang="en-US" sz="1200" dirty="0"/>
+          </a:p>
+        </p:txBody>
+      </p:sp>
+      <p:sp>
+        <p:nvSpPr>
+          <p:cNvPr id="7" name="Text 5"/>
           <p:cNvSpPr/>
           <p:nvPr/>
         </p:nvSpPr>
@@ -3109,7 +3827,7 @@
                 <a:ea typeface="Georgia" pitchFamily="34" charset="-122"/>
                 <a:cs typeface="Georgia" pitchFamily="34" charset="-120"/>
               </a:rPr>
-              <a:t>Citation(s) used</a:t>
+              <a:t>Activity (10 min) — Compute the Mādhava series</a:t>
             </a:r>
             <a:endParaRPr lang="en-US" sz="1800" dirty="0"/>
           </a:p>
@@ -3124,7 +3842,7 @@
         <p:spPr>
           <a:xfrm>
             <a:off x="406301" y="870942"/>
-            <a:ext cx="8498026" cy="426541"/>
+            <a:ext cx="8498026" cy="213271"/>
           </a:xfrm>
           <a:prstGeom prst="rect">
             <a:avLst/>
@@ -3157,22 +3875,45 @@
                 <a:ea typeface="Arial" pitchFamily="34" charset="-122"/>
                 <a:cs typeface="Arial" pitchFamily="34" charset="-120"/>
               </a:rPr>
-              <a:t>– Plofker (2009), Chapters 4–7. – Bhāskara II, </a:t>
-            </a:r>
-            <a:pPr algn="l" indent="0" marL="0">
-              <a:lnSpc>
-                <a:spcPts val="1680"/>
-              </a:lnSpc>
-              <a:spcBef>
-                <a:spcPts val="300"/>
-              </a:spcBef>
-              <a:spcAft>
-                <a:spcPts val="300"/>
-              </a:spcAft>
-              <a:buNone/>
-            </a:pPr>
-            <a:r>
-              <a:rPr lang="en-US" sz="1200" i="1" dirty="0">
+              <a:t>Class together. On the board:</a:t>
+            </a:r>
+            <a:endParaRPr lang="en-US" sz="1200" dirty="0"/>
+          </a:p>
+        </p:txBody>
+      </p:sp>
+      <p:sp>
+        <p:nvSpPr>
+          <p:cNvPr id="5" name="Text 3"/>
+          <p:cNvSpPr/>
+          <p:nvPr/>
+        </p:nvSpPr>
+        <p:spPr>
+          <a:xfrm>
+            <a:off x="634901" y="1173063"/>
+            <a:ext cx="8102798" cy="1257002"/>
+          </a:xfrm>
+          <a:prstGeom prst="rect">
+            <a:avLst/>
+          </a:prstGeom>
+          <a:noFill/>
+          <a:ln/>
+        </p:spPr>
+        <p:txBody>
+          <a:bodyPr wrap="square" lIns="0" tIns="0" rIns="0" bIns="0" rtlCol="0" anchor="t"/>
+          <a:lstStyle/>
+          <a:p>
+            <a:pPr algn="l" marL="342900" indent="-342900">
+              <a:lnSpc>
+                <a:spcPts val="1620"/>
+              </a:lnSpc>
+              <a:spcAft>
+                <a:spcPts val="300"/>
+              </a:spcAft>
+              <a:buSzPct val="100000"/>
+              <a:buChar char="•"/>
+            </a:pPr>
+            <a:r>
+              <a:rPr lang="en-US" sz="1200" dirty="0">
                 <a:solidFill>
                   <a:srgbClr val="1C2833"/>
                 </a:solidFill>
@@ -3180,19 +3921,20 @@
                 <a:ea typeface="Arial" pitchFamily="34" charset="-122"/>
                 <a:cs typeface="Arial" pitchFamily="34" charset="-120"/>
               </a:rPr>
-              <a:t>Līlāvatī</a:t>
-            </a:r>
-            <a:pPr algn="l" indent="0" marL="0">
-              <a:lnSpc>
-                <a:spcPts val="1680"/>
-              </a:lnSpc>
-              <a:spcBef>
-                <a:spcPts val="300"/>
-              </a:spcBef>
-              <a:spcAft>
-                <a:spcPts val="300"/>
-              </a:spcAft>
-              <a:buNone/>
+              <a:t>Start at 1.</a:t>
+            </a:r>
+            <a:endParaRPr lang="en-US" sz="1200" dirty="0"/>
+          </a:p>
+          <a:p>
+            <a:pPr algn="l" marL="342900" indent="-342900">
+              <a:lnSpc>
+                <a:spcPts val="1620"/>
+              </a:lnSpc>
+              <a:spcAft>
+                <a:spcPts val="300"/>
+              </a:spcAft>
+              <a:buSzPct val="100000"/>
+              <a:buChar char="•"/>
             </a:pPr>
             <a:r>
               <a:rPr lang="en-US" sz="1200" dirty="0">
@@ -3203,7 +3945,1957 @@
                 <a:ea typeface="Arial" pitchFamily="34" charset="-122"/>
                 <a:cs typeface="Arial" pitchFamily="34" charset="-120"/>
               </a:rPr>
-              <a:t> (1150 CE) — translation by Colebrooke (1817) or Patwardhan, Naimpally, Singh (2001). – Hayashi (1995) on the Bakhshali manuscript.</a:t>
+              <a:t>Subtract 1/3. Add 1/5. Subtract 1/7. Add 1/9. ...</a:t>
+            </a:r>
+            <a:endParaRPr lang="en-US" sz="1200" dirty="0"/>
+          </a:p>
+          <a:p>
+            <a:pPr algn="l" marL="342900" indent="-342900">
+              <a:lnSpc>
+                <a:spcPts val="1620"/>
+              </a:lnSpc>
+              <a:spcAft>
+                <a:spcPts val="300"/>
+              </a:spcAft>
+              <a:buSzPct val="100000"/>
+              <a:buChar char="•"/>
+            </a:pPr>
+            <a:r>
+              <a:rPr lang="en-US" sz="1200" dirty="0">
+                <a:solidFill>
+                  <a:srgbClr val="1C2833"/>
+                </a:solidFill>
+                <a:latin typeface="Arial" pitchFamily="34" charset="0"/>
+                <a:ea typeface="Arial" pitchFamily="34" charset="-122"/>
+                <a:cs typeface="Arial" pitchFamily="34" charset="-120"/>
+              </a:rPr>
+              <a:t>After 4 terms: 1 − 0.333 + 0.2 − 0.143 = 0.724</a:t>
+            </a:r>
+            <a:endParaRPr lang="en-US" sz="1200" dirty="0"/>
+          </a:p>
+          <a:p>
+            <a:pPr algn="l" marL="342900" indent="-342900">
+              <a:lnSpc>
+                <a:spcPts val="1620"/>
+              </a:lnSpc>
+              <a:spcAft>
+                <a:spcPts val="300"/>
+              </a:spcAft>
+              <a:buSzPct val="100000"/>
+              <a:buChar char="•"/>
+            </a:pPr>
+            <a:r>
+              <a:rPr lang="en-US" sz="1200" dirty="0">
+                <a:solidFill>
+                  <a:srgbClr val="1C2833"/>
+                </a:solidFill>
+                <a:latin typeface="Arial" pitchFamily="34" charset="0"/>
+                <a:ea typeface="Arial" pitchFamily="34" charset="-122"/>
+                <a:cs typeface="Arial" pitchFamily="34" charset="-120"/>
+              </a:rPr>
+              <a:t>Multiply by 4: 2.896 (close to π = 3.14)</a:t>
+            </a:r>
+            <a:endParaRPr lang="en-US" sz="1200" dirty="0"/>
+          </a:p>
+          <a:p>
+            <a:pPr algn="l" marL="342900" indent="-342900">
+              <a:lnSpc>
+                <a:spcPts val="1620"/>
+              </a:lnSpc>
+              <a:spcAft>
+                <a:spcPts val="300"/>
+              </a:spcAft>
+              <a:buSzPct val="100000"/>
+              <a:buChar char="•"/>
+            </a:pPr>
+            <a:r>
+              <a:rPr lang="en-US" sz="1200" dirty="0">
+                <a:solidFill>
+                  <a:srgbClr val="1C2833"/>
+                </a:solidFill>
+                <a:latin typeface="Arial" pitchFamily="34" charset="0"/>
+                <a:ea typeface="Arial" pitchFamily="34" charset="-122"/>
+                <a:cs typeface="Arial" pitchFamily="34" charset="-120"/>
+              </a:rPr>
+              <a:t>After 10 terms it gets closer.</a:t>
+            </a:r>
+            <a:endParaRPr lang="en-US" sz="1200" dirty="0"/>
+          </a:p>
+        </p:txBody>
+      </p:sp>
+      <p:sp>
+        <p:nvSpPr>
+          <p:cNvPr id="6" name="Text 4"/>
+          <p:cNvSpPr/>
+          <p:nvPr/>
+        </p:nvSpPr>
+        <p:spPr>
+          <a:xfrm>
+            <a:off x="406301" y="4434929"/>
+            <a:ext cx="8498026" cy="213271"/>
+          </a:xfrm>
+          <a:prstGeom prst="rect">
+            <a:avLst/>
+          </a:prstGeom>
+          <a:noFill/>
+          <a:ln/>
+        </p:spPr>
+        <p:txBody>
+          <a:bodyPr wrap="square" lIns="0" tIns="0" rIns="0" bIns="0" rtlCol="0" anchor="t"/>
+          <a:lstStyle/>
+          <a:p>
+            <a:pPr algn="l" indent="0" marL="0">
+              <a:lnSpc>
+                <a:spcPts val="1680"/>
+              </a:lnSpc>
+              <a:spcBef>
+                <a:spcPts val="300"/>
+              </a:spcBef>
+              <a:spcAft>
+                <a:spcPts val="300"/>
+              </a:spcAft>
+              <a:buNone/>
+            </a:pPr>
+            <a:r>
+              <a:rPr lang="en-US" sz="1200" dirty="0">
+                <a:solidFill>
+                  <a:srgbClr val="1C2833"/>
+                </a:solidFill>
+                <a:latin typeface="Arial" pitchFamily="34" charset="0"/>
+                <a:ea typeface="Arial" pitchFamily="34" charset="-122"/>
+                <a:cs typeface="Arial" pitchFamily="34" charset="-120"/>
+              </a:rPr>
+              <a:t>Middle ·  · IKS Curriculum</a:t>
+            </a:r>
+            <a:endParaRPr lang="en-US" sz="1200" dirty="0"/>
+          </a:p>
+        </p:txBody>
+      </p:sp>
+    </p:spTree>
+  </p:cSld>
+  <p:clrMapOvr>
+    <a:masterClrMapping/>
+  </p:clrMapOvr>
+</p:sld>
+</file>
+
+<file path=ppt/slides/slide14.xml><?xml version="1.0" encoding="utf-8"?>
+<p:sld xmlns:a="http://schemas.openxmlformats.org/drawingml/2006/main" xmlns:r="http://schemas.openxmlformats.org/officeDocument/2006/relationships" xmlns:p="http://schemas.openxmlformats.org/presentationml/2006/main">
+  <p:cSld name="Slide 14">
+    <p:bg>
+      <p:bgPr>
+        <a:solidFill>
+          <a:srgbClr val="FFFFFF"/>
+        </a:solidFill>
+      </p:bgPr>
+    </p:bg>
+    <p:spTree>
+      <p:nvGrpSpPr>
+        <p:cNvPr id="1" name=""/>
+        <p:cNvGrpSpPr/>
+        <p:nvPr/>
+      </p:nvGrpSpPr>
+      <p:grpSpPr>
+        <a:xfrm>
+          <a:off x="0" y="0"/>
+          <a:ext cx="0" cy="0"/>
+          <a:chOff x="0" y="0"/>
+          <a:chExt cx="0" cy="0"/>
+        </a:xfrm>
+      </p:grpSpPr>
+      <p:sp>
+        <p:nvSpPr>
+          <p:cNvPr id="2" name="Text 0"/>
+          <p:cNvSpPr/>
+          <p:nvPr/>
+        </p:nvSpPr>
+        <p:spPr>
+          <a:xfrm>
+            <a:off x="0" y="0"/>
+            <a:ext cx="9144000" cy="101501"/>
+          </a:xfrm>
+          <a:prstGeom prst="rect">
+            <a:avLst/>
+          </a:prstGeom>
+          <a:solidFill>
+            <a:srgbClr val="277884"/>
+          </a:solidFill>
+          <a:ln/>
+        </p:spPr>
+        <p:txBody>
+          <a:bodyPr wrap="square" rtlCol="0" anchor="ctr"/>
+          <a:lstStyle/>
+          <a:p>
+            <a:pPr indent="0" marL="0">
+              <a:buNone/>
+            </a:pPr>
+            <a:endParaRPr lang="en-US" dirty="0"/>
+          </a:p>
+        </p:txBody>
+      </p:sp>
+      <p:sp>
+        <p:nvSpPr>
+          <p:cNvPr id="3" name="Text 1"/>
+          <p:cNvSpPr/>
+          <p:nvPr/>
+        </p:nvSpPr>
+        <p:spPr>
+          <a:xfrm>
+            <a:off x="406301" y="457051"/>
+            <a:ext cx="8498026" cy="274290"/>
+          </a:xfrm>
+          <a:prstGeom prst="rect">
+            <a:avLst/>
+          </a:prstGeom>
+          <a:noFill/>
+          <a:ln/>
+        </p:spPr>
+        <p:txBody>
+          <a:bodyPr wrap="square" lIns="0" tIns="0" rIns="0" bIns="0" rtlCol="0" anchor="t"/>
+          <a:lstStyle/>
+          <a:p>
+            <a:pPr algn="l" indent="0" marL="0">
+              <a:lnSpc>
+                <a:spcPts val="2160"/>
+              </a:lnSpc>
+              <a:spcBef>
+                <a:spcPts val="600"/>
+              </a:spcBef>
+              <a:spcAft>
+                <a:spcPts val="800"/>
+              </a:spcAft>
+              <a:buNone/>
+            </a:pPr>
+            <a:r>
+              <a:rPr lang="en-US" sz="1800" b="1" dirty="0">
+                <a:solidFill>
+                  <a:srgbClr val="FE4447"/>
+                </a:solidFill>
+                <a:latin typeface="Georgia" pitchFamily="34" charset="0"/>
+                <a:ea typeface="Georgia" pitchFamily="34" charset="-122"/>
+                <a:cs typeface="Georgia" pitchFamily="34" charset="-120"/>
+              </a:rPr>
+              <a:t>Activity (10 min) — Compute the Mādhava series (cont.)</a:t>
+            </a:r>
+            <a:endParaRPr lang="en-US" sz="1800" dirty="0"/>
+          </a:p>
+        </p:txBody>
+      </p:sp>
+      <p:sp>
+        <p:nvSpPr>
+          <p:cNvPr id="4" name="Text 2"/>
+          <p:cNvSpPr/>
+          <p:nvPr/>
+        </p:nvSpPr>
+        <p:spPr>
+          <a:xfrm>
+            <a:off x="406301" y="870942"/>
+            <a:ext cx="8498026" cy="426541"/>
+          </a:xfrm>
+          <a:prstGeom prst="rect">
+            <a:avLst/>
+          </a:prstGeom>
+          <a:noFill/>
+          <a:ln/>
+        </p:spPr>
+        <p:txBody>
+          <a:bodyPr wrap="square" lIns="0" tIns="0" rIns="0" bIns="0" rtlCol="0" anchor="t"/>
+          <a:lstStyle/>
+          <a:p>
+            <a:pPr algn="l" indent="0" marL="0">
+              <a:lnSpc>
+                <a:spcPts val="1680"/>
+              </a:lnSpc>
+              <a:spcBef>
+                <a:spcPts val="300"/>
+              </a:spcBef>
+              <a:spcAft>
+                <a:spcPts val="300"/>
+              </a:spcAft>
+              <a:buNone/>
+            </a:pPr>
+            <a:r>
+              <a:rPr lang="en-US" sz="1200" dirty="0">
+                <a:solidFill>
+                  <a:srgbClr val="1C2833"/>
+                </a:solidFill>
+                <a:latin typeface="Arial" pitchFamily="34" charset="0"/>
+                <a:ea typeface="Arial" pitchFamily="34" charset="-122"/>
+                <a:cs typeface="Arial" pitchFamily="34" charset="-120"/>
+              </a:rPr>
+              <a:t>The series converges SLOWLY — that's one reason it wasn't useful as a calculation method. But proving the </a:t>
+            </a:r>
+            <a:pPr algn="l" indent="0" marL="0">
+              <a:lnSpc>
+                <a:spcPts val="1680"/>
+              </a:lnSpc>
+              <a:spcBef>
+                <a:spcPts val="300"/>
+              </a:spcBef>
+              <a:spcAft>
+                <a:spcPts val="300"/>
+              </a:spcAft>
+              <a:buNone/>
+            </a:pPr>
+            <a:r>
+              <a:rPr lang="en-US" sz="1200" i="1" dirty="0">
+                <a:solidFill>
+                  <a:srgbClr val="1C2833"/>
+                </a:solidFill>
+                <a:latin typeface="Arial" pitchFamily="34" charset="0"/>
+                <a:ea typeface="Arial" pitchFamily="34" charset="-122"/>
+                <a:cs typeface="Arial" pitchFamily="34" charset="-120"/>
+              </a:rPr>
+              <a:t>form</a:t>
+            </a:r>
+            <a:pPr algn="l" indent="0" marL="0">
+              <a:lnSpc>
+                <a:spcPts val="1680"/>
+              </a:lnSpc>
+              <a:spcBef>
+                <a:spcPts val="300"/>
+              </a:spcBef>
+              <a:spcAft>
+                <a:spcPts val="300"/>
+              </a:spcAft>
+              <a:buNone/>
+            </a:pPr>
+            <a:r>
+              <a:rPr lang="en-US" sz="1200" dirty="0">
+                <a:solidFill>
+                  <a:srgbClr val="1C2833"/>
+                </a:solidFill>
+                <a:latin typeface="Arial" pitchFamily="34" charset="0"/>
+                <a:ea typeface="Arial" pitchFamily="34" charset="-122"/>
+                <a:cs typeface="Arial" pitchFamily="34" charset="-120"/>
+              </a:rPr>
+              <a:t> was a huge mathematical achievement.</a:t>
+            </a:r>
+            <a:endParaRPr lang="en-US" sz="1200" dirty="0"/>
+          </a:p>
+        </p:txBody>
+      </p:sp>
+      <p:sp>
+        <p:nvSpPr>
+          <p:cNvPr id="5" name="Text 3"/>
+          <p:cNvSpPr/>
+          <p:nvPr/>
+        </p:nvSpPr>
+        <p:spPr>
+          <a:xfrm>
+            <a:off x="406301" y="4434929"/>
+            <a:ext cx="8498026" cy="213271"/>
+          </a:xfrm>
+          <a:prstGeom prst="rect">
+            <a:avLst/>
+          </a:prstGeom>
+          <a:noFill/>
+          <a:ln/>
+        </p:spPr>
+        <p:txBody>
+          <a:bodyPr wrap="square" lIns="0" tIns="0" rIns="0" bIns="0" rtlCol="0" anchor="t"/>
+          <a:lstStyle/>
+          <a:p>
+            <a:pPr algn="l" indent="0" marL="0">
+              <a:lnSpc>
+                <a:spcPts val="1680"/>
+              </a:lnSpc>
+              <a:spcBef>
+                <a:spcPts val="300"/>
+              </a:spcBef>
+              <a:spcAft>
+                <a:spcPts val="300"/>
+              </a:spcAft>
+              <a:buNone/>
+            </a:pPr>
+            <a:r>
+              <a:rPr lang="en-US" sz="1200" dirty="0">
+                <a:solidFill>
+                  <a:srgbClr val="1C2833"/>
+                </a:solidFill>
+                <a:latin typeface="Arial" pitchFamily="34" charset="0"/>
+                <a:ea typeface="Arial" pitchFamily="34" charset="-122"/>
+                <a:cs typeface="Arial" pitchFamily="34" charset="-120"/>
+              </a:rPr>
+              <a:t>Middle ·  · IKS Curriculum</a:t>
+            </a:r>
+            <a:endParaRPr lang="en-US" sz="1200" dirty="0"/>
+          </a:p>
+        </p:txBody>
+      </p:sp>
+    </p:spTree>
+  </p:cSld>
+  <p:clrMapOvr>
+    <a:masterClrMapping/>
+  </p:clrMapOvr>
+</p:sld>
+</file>
+
+<file path=ppt/slides/slide15.xml><?xml version="1.0" encoding="utf-8"?>
+<p:sld xmlns:a="http://schemas.openxmlformats.org/drawingml/2006/main" xmlns:r="http://schemas.openxmlformats.org/officeDocument/2006/relationships" xmlns:p="http://schemas.openxmlformats.org/presentationml/2006/main">
+  <p:cSld name="Slide 15">
+    <p:bg>
+      <p:bgPr>
+        <a:solidFill>
+          <a:srgbClr val="FFFFFF"/>
+        </a:solidFill>
+      </p:bgPr>
+    </p:bg>
+    <p:spTree>
+      <p:nvGrpSpPr>
+        <p:cNvPr id="1" name=""/>
+        <p:cNvGrpSpPr/>
+        <p:nvPr/>
+      </p:nvGrpSpPr>
+      <p:grpSpPr>
+        <a:xfrm>
+          <a:off x="0" y="0"/>
+          <a:ext cx="0" cy="0"/>
+          <a:chOff x="0" y="0"/>
+          <a:chExt cx="0" cy="0"/>
+        </a:xfrm>
+      </p:grpSpPr>
+      <p:sp>
+        <p:nvSpPr>
+          <p:cNvPr id="2" name="Text 0"/>
+          <p:cNvSpPr/>
+          <p:nvPr/>
+        </p:nvSpPr>
+        <p:spPr>
+          <a:xfrm>
+            <a:off x="0" y="0"/>
+            <a:ext cx="9144000" cy="101501"/>
+          </a:xfrm>
+          <a:prstGeom prst="rect">
+            <a:avLst/>
+          </a:prstGeom>
+          <a:solidFill>
+            <a:srgbClr val="277884"/>
+          </a:solidFill>
+          <a:ln/>
+        </p:spPr>
+        <p:txBody>
+          <a:bodyPr wrap="square" rtlCol="0" anchor="ctr"/>
+          <a:lstStyle/>
+          <a:p>
+            <a:pPr indent="0" marL="0">
+              <a:buNone/>
+            </a:pPr>
+            <a:endParaRPr lang="en-US" dirty="0"/>
+          </a:p>
+        </p:txBody>
+      </p:sp>
+      <p:sp>
+        <p:nvSpPr>
+          <p:cNvPr id="3" name="Text 1"/>
+          <p:cNvSpPr/>
+          <p:nvPr/>
+        </p:nvSpPr>
+        <p:spPr>
+          <a:xfrm>
+            <a:off x="406301" y="457051"/>
+            <a:ext cx="8498026" cy="274290"/>
+          </a:xfrm>
+          <a:prstGeom prst="rect">
+            <a:avLst/>
+          </a:prstGeom>
+          <a:noFill/>
+          <a:ln/>
+        </p:spPr>
+        <p:txBody>
+          <a:bodyPr wrap="square" lIns="0" tIns="0" rIns="0" bIns="0" rtlCol="0" anchor="t"/>
+          <a:lstStyle/>
+          <a:p>
+            <a:pPr algn="l" indent="0" marL="0">
+              <a:lnSpc>
+                <a:spcPts val="2160"/>
+              </a:lnSpc>
+              <a:spcBef>
+                <a:spcPts val="600"/>
+              </a:spcBef>
+              <a:spcAft>
+                <a:spcPts val="800"/>
+              </a:spcAft>
+              <a:buNone/>
+            </a:pPr>
+            <a:r>
+              <a:rPr lang="en-US" sz="1800" b="1" dirty="0">
+                <a:solidFill>
+                  <a:srgbClr val="FE4447"/>
+                </a:solidFill>
+                <a:latin typeface="Georgia" pitchFamily="34" charset="0"/>
+                <a:ea typeface="Georgia" pitchFamily="34" charset="-122"/>
+                <a:cs typeface="Georgia" pitchFamily="34" charset="-120"/>
+              </a:rPr>
+              <a:t>Wrap-up (5 min)</a:t>
+            </a:r>
+            <a:endParaRPr lang="en-US" sz="1800" dirty="0"/>
+          </a:p>
+        </p:txBody>
+      </p:sp>
+      <p:sp>
+        <p:nvSpPr>
+          <p:cNvPr id="4" name="Text 2"/>
+          <p:cNvSpPr/>
+          <p:nvPr/>
+        </p:nvSpPr>
+        <p:spPr>
+          <a:xfrm>
+            <a:off x="634901" y="883593"/>
+            <a:ext cx="8102798" cy="281880"/>
+          </a:xfrm>
+          <a:prstGeom prst="rect">
+            <a:avLst/>
+          </a:prstGeom>
+          <a:noFill/>
+          <a:ln/>
+        </p:spPr>
+        <p:txBody>
+          <a:bodyPr wrap="square" lIns="0" tIns="0" rIns="0" bIns="0" rtlCol="0" anchor="t"/>
+          <a:lstStyle/>
+          <a:p>
+            <a:pPr algn="l" marL="342900" indent="-342900">
+              <a:lnSpc>
+                <a:spcPts val="1620"/>
+              </a:lnSpc>
+              <a:spcAft>
+                <a:spcPts val="300"/>
+              </a:spcAft>
+              <a:buSzPct val="100000"/>
+              <a:buChar char="•"/>
+            </a:pPr>
+            <a:r>
+              <a:rPr lang="en-US" sz="1200" dirty="0">
+                <a:solidFill>
+                  <a:srgbClr val="1C2833"/>
+                </a:solidFill>
+                <a:latin typeface="Arial" pitchFamily="34" charset="0"/>
+                <a:ea typeface="Arial" pitchFamily="34" charset="-122"/>
+                <a:cs typeface="Arial" pitchFamily="34" charset="-120"/>
+              </a:rPr>
+              <a:t>Preview Day 7: </a:t>
+            </a:r>
+            <a:pPr algn="l" indent="0" marL="0">
+              <a:lnSpc>
+                <a:spcPts val="1620"/>
+              </a:lnSpc>
+              <a:spcAft>
+                <a:spcPts val="300"/>
+              </a:spcAft>
+              <a:buNone/>
+            </a:pPr>
+            <a:r>
+              <a:rPr lang="en-US" sz="1200" i="1" dirty="0">
+                <a:solidFill>
+                  <a:srgbClr val="1C2833"/>
+                </a:solidFill>
+                <a:latin typeface="Arial" pitchFamily="34" charset="0"/>
+                <a:ea typeface="Arial" pitchFamily="34" charset="-122"/>
+                <a:cs typeface="Arial" pitchFamily="34" charset="-120"/>
+              </a:rPr>
+              <a:t>"Tomorrow — Indian astronomy. Aryabhata."</a:t>
+            </a:r>
+            <a:endParaRPr lang="en-US" sz="1200" dirty="0"/>
+          </a:p>
+        </p:txBody>
+      </p:sp>
+      <p:sp>
+        <p:nvSpPr>
+          <p:cNvPr id="5" name="Text 3"/>
+          <p:cNvSpPr/>
+          <p:nvPr/>
+        </p:nvSpPr>
+        <p:spPr>
+          <a:xfrm>
+            <a:off x="406301" y="4434929"/>
+            <a:ext cx="8498026" cy="213271"/>
+          </a:xfrm>
+          <a:prstGeom prst="rect">
+            <a:avLst/>
+          </a:prstGeom>
+          <a:noFill/>
+          <a:ln/>
+        </p:spPr>
+        <p:txBody>
+          <a:bodyPr wrap="square" lIns="0" tIns="0" rIns="0" bIns="0" rtlCol="0" anchor="t"/>
+          <a:lstStyle/>
+          <a:p>
+            <a:pPr algn="l" indent="0" marL="0">
+              <a:lnSpc>
+                <a:spcPts val="1680"/>
+              </a:lnSpc>
+              <a:spcBef>
+                <a:spcPts val="300"/>
+              </a:spcBef>
+              <a:spcAft>
+                <a:spcPts val="300"/>
+              </a:spcAft>
+              <a:buNone/>
+            </a:pPr>
+            <a:r>
+              <a:rPr lang="en-US" sz="1200" dirty="0">
+                <a:solidFill>
+                  <a:srgbClr val="1C2833"/>
+                </a:solidFill>
+                <a:latin typeface="Arial" pitchFamily="34" charset="0"/>
+                <a:ea typeface="Arial" pitchFamily="34" charset="-122"/>
+                <a:cs typeface="Arial" pitchFamily="34" charset="-120"/>
+              </a:rPr>
+              <a:t>Middle ·  · IKS Curriculum</a:t>
+            </a:r>
+            <a:endParaRPr lang="en-US" sz="1200" dirty="0"/>
+          </a:p>
+        </p:txBody>
+      </p:sp>
+    </p:spTree>
+  </p:cSld>
+  <p:clrMapOvr>
+    <a:masterClrMapping/>
+  </p:clrMapOvr>
+</p:sld>
+</file>
+
+<file path=ppt/slides/slide16.xml><?xml version="1.0" encoding="utf-8"?>
+<p:sld xmlns:a="http://schemas.openxmlformats.org/drawingml/2006/main" xmlns:r="http://schemas.openxmlformats.org/officeDocument/2006/relationships" xmlns:p="http://schemas.openxmlformats.org/presentationml/2006/main">
+  <p:cSld name="Slide 16">
+    <p:bg>
+      <p:bgPr>
+        <a:solidFill>
+          <a:srgbClr val="FFFFFF"/>
+        </a:solidFill>
+      </p:bgPr>
+    </p:bg>
+    <p:spTree>
+      <p:nvGrpSpPr>
+        <p:cNvPr id="1" name=""/>
+        <p:cNvGrpSpPr/>
+        <p:nvPr/>
+      </p:nvGrpSpPr>
+      <p:grpSpPr>
+        <a:xfrm>
+          <a:off x="0" y="0"/>
+          <a:ext cx="0" cy="0"/>
+          <a:chOff x="0" y="0"/>
+          <a:chExt cx="0" cy="0"/>
+        </a:xfrm>
+      </p:grpSpPr>
+      <p:sp>
+        <p:nvSpPr>
+          <p:cNvPr id="2" name="Text 0"/>
+          <p:cNvSpPr/>
+          <p:nvPr/>
+        </p:nvSpPr>
+        <p:spPr>
+          <a:xfrm>
+            <a:off x="0" y="0"/>
+            <a:ext cx="9144000" cy="101501"/>
+          </a:xfrm>
+          <a:prstGeom prst="rect">
+            <a:avLst/>
+          </a:prstGeom>
+          <a:solidFill>
+            <a:srgbClr val="277884"/>
+          </a:solidFill>
+          <a:ln/>
+        </p:spPr>
+        <p:txBody>
+          <a:bodyPr wrap="square" rtlCol="0" anchor="ctr"/>
+          <a:lstStyle/>
+          <a:p>
+            <a:pPr indent="0" marL="0">
+              <a:buNone/>
+            </a:pPr>
+            <a:endParaRPr lang="en-US" dirty="0"/>
+          </a:p>
+        </p:txBody>
+      </p:sp>
+      <p:sp>
+        <p:nvSpPr>
+          <p:cNvPr id="3" name="Text 1"/>
+          <p:cNvSpPr/>
+          <p:nvPr/>
+        </p:nvSpPr>
+        <p:spPr>
+          <a:xfrm>
+            <a:off x="406301" y="457051"/>
+            <a:ext cx="8498026" cy="274290"/>
+          </a:xfrm>
+          <a:prstGeom prst="rect">
+            <a:avLst/>
+          </a:prstGeom>
+          <a:noFill/>
+          <a:ln/>
+        </p:spPr>
+        <p:txBody>
+          <a:bodyPr wrap="square" lIns="0" tIns="0" rIns="0" bIns="0" rtlCol="0" anchor="t"/>
+          <a:lstStyle/>
+          <a:p>
+            <a:pPr algn="l" indent="0" marL="0">
+              <a:lnSpc>
+                <a:spcPts val="2160"/>
+              </a:lnSpc>
+              <a:spcBef>
+                <a:spcPts val="600"/>
+              </a:spcBef>
+              <a:spcAft>
+                <a:spcPts val="800"/>
+              </a:spcAft>
+              <a:buNone/>
+            </a:pPr>
+            <a:r>
+              <a:rPr lang="en-US" sz="1800" b="1" dirty="0">
+                <a:solidFill>
+                  <a:srgbClr val="FE4447"/>
+                </a:solidFill>
+                <a:latin typeface="Georgia" pitchFamily="34" charset="0"/>
+                <a:ea typeface="Georgia" pitchFamily="34" charset="-122"/>
+                <a:cs typeface="Georgia" pitchFamily="34" charset="-120"/>
+              </a:rPr>
+              <a:t>Student-facing content</a:t>
+            </a:r>
+            <a:endParaRPr lang="en-US" sz="1800" dirty="0"/>
+          </a:p>
+        </p:txBody>
+      </p:sp>
+      <p:sp>
+        <p:nvSpPr>
+          <p:cNvPr id="4" name="Text 2"/>
+          <p:cNvSpPr/>
+          <p:nvPr/>
+        </p:nvSpPr>
+        <p:spPr>
+          <a:xfrm>
+            <a:off x="406301" y="883593"/>
+            <a:ext cx="8331398" cy="2457450"/>
+          </a:xfrm>
+          <a:prstGeom prst="rect">
+            <a:avLst/>
+          </a:prstGeom>
+          <a:solidFill>
+            <a:srgbClr val="F4F8F9"/>
+          </a:solidFill>
+          <a:ln/>
+        </p:spPr>
+        <p:txBody>
+          <a:bodyPr wrap="square" rtlCol="0" anchor="ctr"/>
+          <a:lstStyle/>
+          <a:p>
+            <a:pPr indent="0" marL="0">
+              <a:buNone/>
+            </a:pPr>
+            <a:endParaRPr lang="en-US" dirty="0"/>
+          </a:p>
+        </p:txBody>
+      </p:sp>
+      <p:sp>
+        <p:nvSpPr>
+          <p:cNvPr id="5" name="Shape 3"/>
+          <p:cNvSpPr/>
+          <p:nvPr/>
+        </p:nvSpPr>
+        <p:spPr>
+          <a:xfrm>
+            <a:off x="434876" y="883593"/>
+            <a:ext cx="0" cy="2457450"/>
+          </a:xfrm>
+          <a:prstGeom prst="line">
+            <a:avLst/>
+          </a:prstGeom>
+          <a:noFill/>
+          <a:ln w="57150">
+            <a:solidFill>
+              <a:srgbClr val="FE4447"/>
+            </a:solidFill>
+            <a:prstDash val="solid"/>
+          </a:ln>
+        </p:spPr>
+      </p:sp>
+      <p:sp>
+        <p:nvSpPr>
+          <p:cNvPr id="6" name="Text 4"/>
+          <p:cNvSpPr/>
+          <p:nvPr/>
+        </p:nvSpPr>
+        <p:spPr>
+          <a:xfrm>
+            <a:off x="692051" y="1074093"/>
+            <a:ext cx="7973389" cy="230981"/>
+          </a:xfrm>
+          <a:prstGeom prst="rect">
+            <a:avLst/>
+          </a:prstGeom>
+          <a:noFill/>
+          <a:ln/>
+        </p:spPr>
+        <p:txBody>
+          <a:bodyPr wrap="square" lIns="0" tIns="0" rIns="0" bIns="0" rtlCol="0" anchor="t"/>
+          <a:lstStyle/>
+          <a:p>
+            <a:pPr algn="l" indent="0" marL="0">
+              <a:lnSpc>
+                <a:spcPts val="1820"/>
+              </a:lnSpc>
+              <a:spcBef>
+                <a:spcPts val="300"/>
+              </a:spcBef>
+              <a:spcAft>
+                <a:spcPts val="300"/>
+              </a:spcAft>
+              <a:buNone/>
+            </a:pPr>
+            <a:r>
+              <a:rPr lang="en-US" sz="1300" b="1" i="1" dirty="0">
+                <a:solidFill>
+                  <a:srgbClr val="1C2833"/>
+                </a:solidFill>
+                <a:latin typeface="Georgia" pitchFamily="34" charset="0"/>
+                <a:ea typeface="Georgia" pitchFamily="34" charset="-122"/>
+                <a:cs typeface="Georgia" pitchFamily="34" charset="-120"/>
+              </a:rPr>
+              <a:t>Three Indian Mathematical Contributions</a:t>
+            </a:r>
+            <a:endParaRPr lang="en-US" sz="1300" dirty="0"/>
+          </a:p>
+        </p:txBody>
+      </p:sp>
+      <p:sp>
+        <p:nvSpPr>
+          <p:cNvPr id="7" name="Text 5"/>
+          <p:cNvSpPr/>
+          <p:nvPr/>
+        </p:nvSpPr>
+        <p:spPr>
+          <a:xfrm>
+            <a:off x="692051" y="1343174"/>
+            <a:ext cx="7973389" cy="230981"/>
+          </a:xfrm>
+          <a:prstGeom prst="rect">
+            <a:avLst/>
+          </a:prstGeom>
+          <a:noFill/>
+          <a:ln/>
+        </p:spPr>
+        <p:txBody>
+          <a:bodyPr wrap="square" lIns="0" tIns="0" rIns="0" bIns="0" rtlCol="0" anchor="t"/>
+          <a:lstStyle/>
+          <a:p>
+            <a:pPr algn="l" indent="0" marL="0">
+              <a:lnSpc>
+                <a:spcPts val="1820"/>
+              </a:lnSpc>
+              <a:spcBef>
+                <a:spcPts val="300"/>
+              </a:spcBef>
+              <a:spcAft>
+                <a:spcPts val="300"/>
+              </a:spcAft>
+              <a:buNone/>
+            </a:pPr>
+            <a:r>
+              <a:rPr lang="en-US" sz="1300" b="1" i="1" dirty="0">
+                <a:solidFill>
+                  <a:srgbClr val="1C2833"/>
+                </a:solidFill>
+                <a:latin typeface="Georgia" pitchFamily="34" charset="0"/>
+                <a:ea typeface="Georgia" pitchFamily="34" charset="-122"/>
+                <a:cs typeface="Georgia" pitchFamily="34" charset="-120"/>
+              </a:rPr>
+              <a:t>Zero as a number</a:t>
+            </a:r>
+            <a:pPr algn="l" indent="0" marL="0">
+              <a:lnSpc>
+                <a:spcPts val="1820"/>
+              </a:lnSpc>
+              <a:spcBef>
+                <a:spcPts val="300"/>
+              </a:spcBef>
+              <a:spcAft>
+                <a:spcPts val="300"/>
+              </a:spcAft>
+              <a:buNone/>
+            </a:pPr>
+            <a:r>
+              <a:rPr lang="en-US" sz="1300" dirty="0">
+                <a:solidFill>
+                  <a:srgbClr val="1C2833"/>
+                </a:solidFill>
+                <a:latin typeface="Georgia" pitchFamily="34" charset="0"/>
+                <a:ea typeface="Georgia" pitchFamily="34" charset="-122"/>
+                <a:cs typeface="Georgia" pitchFamily="34" charset="-120"/>
+              </a:rPr>
+              <a:t> — Bakhshali manuscript, ~7th c. CE.</a:t>
+            </a:r>
+            <a:endParaRPr lang="en-US" sz="1300" dirty="0"/>
+          </a:p>
+        </p:txBody>
+      </p:sp>
+      <p:sp>
+        <p:nvSpPr>
+          <p:cNvPr id="8" name="Text 6"/>
+          <p:cNvSpPr/>
+          <p:nvPr/>
+        </p:nvSpPr>
+        <p:spPr>
+          <a:xfrm>
+            <a:off x="692051" y="1612255"/>
+            <a:ext cx="7973389" cy="461963"/>
+          </a:xfrm>
+          <a:prstGeom prst="rect">
+            <a:avLst/>
+          </a:prstGeom>
+          <a:noFill/>
+          <a:ln/>
+        </p:spPr>
+        <p:txBody>
+          <a:bodyPr wrap="square" lIns="0" tIns="0" rIns="0" bIns="0" rtlCol="0" anchor="t"/>
+          <a:lstStyle/>
+          <a:p>
+            <a:pPr algn="l" indent="0" marL="0">
+              <a:lnSpc>
+                <a:spcPts val="1820"/>
+              </a:lnSpc>
+              <a:spcBef>
+                <a:spcPts val="300"/>
+              </a:spcBef>
+              <a:spcAft>
+                <a:spcPts val="300"/>
+              </a:spcAft>
+              <a:buNone/>
+            </a:pPr>
+            <a:r>
+              <a:rPr lang="en-US" sz="1300" b="1" i="1" dirty="0">
+                <a:solidFill>
+                  <a:srgbClr val="1C2833"/>
+                </a:solidFill>
+                <a:latin typeface="Georgia" pitchFamily="34" charset="0"/>
+                <a:ea typeface="Georgia" pitchFamily="34" charset="-122"/>
+                <a:cs typeface="Georgia" pitchFamily="34" charset="-120"/>
+              </a:rPr>
+              <a:t>Decimal place-value system</a:t>
+            </a:r>
+            <a:pPr algn="l" indent="0" marL="0">
+              <a:lnSpc>
+                <a:spcPts val="1820"/>
+              </a:lnSpc>
+              <a:spcBef>
+                <a:spcPts val="300"/>
+              </a:spcBef>
+              <a:spcAft>
+                <a:spcPts val="300"/>
+              </a:spcAft>
+              <a:buNone/>
+            </a:pPr>
+            <a:r>
+              <a:rPr lang="en-US" sz="1300" dirty="0">
+                <a:solidFill>
+                  <a:srgbClr val="1C2833"/>
+                </a:solidFill>
+                <a:latin typeface="Georgia" pitchFamily="34" charset="0"/>
+                <a:ea typeface="Georgia" pitchFamily="34" charset="-122"/>
+                <a:cs typeface="Georgia" pitchFamily="34" charset="-120"/>
+              </a:rPr>
+              <a:t> — by 6th c. CE; adopted by Arab mathematicians (~825 CE); reached Europe (~12th c.).</a:t>
+            </a:r>
+            <a:endParaRPr lang="en-US" sz="1300" dirty="0"/>
+          </a:p>
+        </p:txBody>
+      </p:sp>
+      <p:sp>
+        <p:nvSpPr>
+          <p:cNvPr id="9" name="Text 7"/>
+          <p:cNvSpPr/>
+          <p:nvPr/>
+        </p:nvSpPr>
+        <p:spPr>
+          <a:xfrm>
+            <a:off x="692051" y="2112318"/>
+            <a:ext cx="7973389" cy="230981"/>
+          </a:xfrm>
+          <a:prstGeom prst="rect">
+            <a:avLst/>
+          </a:prstGeom>
+          <a:noFill/>
+          <a:ln/>
+        </p:spPr>
+        <p:txBody>
+          <a:bodyPr wrap="square" lIns="0" tIns="0" rIns="0" bIns="0" rtlCol="0" anchor="t"/>
+          <a:lstStyle/>
+          <a:p>
+            <a:pPr algn="l" indent="0" marL="0">
+              <a:lnSpc>
+                <a:spcPts val="1820"/>
+              </a:lnSpc>
+              <a:spcBef>
+                <a:spcPts val="300"/>
+              </a:spcBef>
+              <a:spcAft>
+                <a:spcPts val="300"/>
+              </a:spcAft>
+              <a:buNone/>
+            </a:pPr>
+            <a:r>
+              <a:rPr lang="en-US" sz="1300" b="1" i="1" dirty="0">
+                <a:solidFill>
+                  <a:srgbClr val="1C2833"/>
+                </a:solidFill>
+                <a:latin typeface="Georgia" pitchFamily="34" charset="0"/>
+                <a:ea typeface="Georgia" pitchFamily="34" charset="-122"/>
+                <a:cs typeface="Georgia" pitchFamily="34" charset="-120"/>
+              </a:rPr>
+              <a:t>Infinite series for π</a:t>
+            </a:r>
+            <a:pPr algn="l" indent="0" marL="0">
+              <a:lnSpc>
+                <a:spcPts val="1820"/>
+              </a:lnSpc>
+              <a:spcBef>
+                <a:spcPts val="300"/>
+              </a:spcBef>
+              <a:spcAft>
+                <a:spcPts val="300"/>
+              </a:spcAft>
+              <a:buNone/>
+            </a:pPr>
+            <a:r>
+              <a:rPr lang="en-US" sz="1300" dirty="0">
+                <a:solidFill>
+                  <a:srgbClr val="1C2833"/>
+                </a:solidFill>
+                <a:latin typeface="Georgia" pitchFamily="34" charset="0"/>
+                <a:ea typeface="Georgia" pitchFamily="34" charset="-122"/>
+                <a:cs typeface="Georgia" pitchFamily="34" charset="-120"/>
+              </a:rPr>
+              <a:t> — Mādhava of Saṅgamagrāma, ~14th c. CE.</a:t>
+            </a:r>
+            <a:endParaRPr lang="en-US" sz="1300" dirty="0"/>
+          </a:p>
+        </p:txBody>
+      </p:sp>
+      <p:sp>
+        <p:nvSpPr>
+          <p:cNvPr id="10" name="Text 8"/>
+          <p:cNvSpPr/>
+          <p:nvPr/>
+        </p:nvSpPr>
+        <p:spPr>
+          <a:xfrm>
+            <a:off x="692051" y="2381399"/>
+            <a:ext cx="7973389" cy="230981"/>
+          </a:xfrm>
+          <a:prstGeom prst="rect">
+            <a:avLst/>
+          </a:prstGeom>
+          <a:noFill/>
+          <a:ln/>
+        </p:spPr>
+        <p:txBody>
+          <a:bodyPr wrap="square" lIns="0" tIns="0" rIns="0" bIns="0" rtlCol="0" anchor="t"/>
+          <a:lstStyle/>
+          <a:p>
+            <a:pPr algn="l" indent="0" marL="0">
+              <a:lnSpc>
+                <a:spcPts val="1820"/>
+              </a:lnSpc>
+              <a:spcBef>
+                <a:spcPts val="300"/>
+              </a:spcBef>
+              <a:spcAft>
+                <a:spcPts val="300"/>
+              </a:spcAft>
+              <a:buNone/>
+            </a:pPr>
+            <a:r>
+              <a:rPr lang="en-US" sz="1300" i="1" dirty="0">
+                <a:solidFill>
+                  <a:srgbClr val="1C2833"/>
+                </a:solidFill>
+                <a:latin typeface="Georgia" pitchFamily="34" charset="0"/>
+                <a:ea typeface="Georgia" pitchFamily="34" charset="-122"/>
+                <a:cs typeface="Georgia" pitchFamily="34" charset="-120"/>
+              </a:rPr>
+              <a:t>$$\pi = 4 \left(1 - \frac{1}{3} + \frac{1}{5} - \frac{1}{7} + \dots\right)$$</a:t>
+            </a:r>
+            <a:endParaRPr lang="en-US" sz="1300" dirty="0"/>
+          </a:p>
+        </p:txBody>
+      </p:sp>
+      <p:sp>
+        <p:nvSpPr>
+          <p:cNvPr id="11" name="Text 9"/>
+          <p:cNvSpPr/>
+          <p:nvPr/>
+        </p:nvSpPr>
+        <p:spPr>
+          <a:xfrm>
+            <a:off x="692051" y="2650480"/>
+            <a:ext cx="7973389" cy="230981"/>
+          </a:xfrm>
+          <a:prstGeom prst="rect">
+            <a:avLst/>
+          </a:prstGeom>
+          <a:noFill/>
+          <a:ln/>
+        </p:spPr>
+        <p:txBody>
+          <a:bodyPr wrap="square" lIns="0" tIns="0" rIns="0" bIns="0" rtlCol="0" anchor="t"/>
+          <a:lstStyle/>
+          <a:p>
+            <a:pPr algn="l" indent="0" marL="0">
+              <a:lnSpc>
+                <a:spcPts val="1820"/>
+              </a:lnSpc>
+              <a:spcBef>
+                <a:spcPts val="300"/>
+              </a:spcBef>
+              <a:spcAft>
+                <a:spcPts val="300"/>
+              </a:spcAft>
+              <a:buNone/>
+            </a:pPr>
+            <a:r>
+              <a:rPr lang="en-US" sz="1300" i="1" dirty="0">
+                <a:solidFill>
+                  <a:srgbClr val="1C2833"/>
+                </a:solidFill>
+                <a:latin typeface="Georgia" pitchFamily="34" charset="0"/>
+                <a:ea typeface="Georgia" pitchFamily="34" charset="-122"/>
+                <a:cs typeface="Georgia" pitchFamily="34" charset="-120"/>
+              </a:rPr>
+              <a:t>(Now sometimes called the "Leibniz series" — Mādhava had it ~300 years before Leibniz.)</a:t>
+            </a:r>
+            <a:endParaRPr lang="en-US" sz="1300" dirty="0"/>
+          </a:p>
+        </p:txBody>
+      </p:sp>
+      <p:sp>
+        <p:nvSpPr>
+          <p:cNvPr id="12" name="Text 10"/>
+          <p:cNvSpPr/>
+          <p:nvPr/>
+        </p:nvSpPr>
+        <p:spPr>
+          <a:xfrm>
+            <a:off x="692051" y="2919561"/>
+            <a:ext cx="7973389" cy="230981"/>
+          </a:xfrm>
+          <a:prstGeom prst="rect">
+            <a:avLst/>
+          </a:prstGeom>
+          <a:noFill/>
+          <a:ln/>
+        </p:spPr>
+        <p:txBody>
+          <a:bodyPr wrap="square" lIns="0" tIns="0" rIns="0" bIns="0" rtlCol="0" anchor="t"/>
+          <a:lstStyle/>
+          <a:p>
+            <a:pPr algn="l" indent="0" marL="0">
+              <a:lnSpc>
+                <a:spcPts val="1820"/>
+              </a:lnSpc>
+              <a:spcBef>
+                <a:spcPts val="300"/>
+              </a:spcBef>
+              <a:spcAft>
+                <a:spcPts val="300"/>
+              </a:spcAft>
+              <a:buNone/>
+            </a:pPr>
+            <a:r>
+              <a:rPr lang="en-US" sz="1300" dirty="0">
+                <a:solidFill>
+                  <a:srgbClr val="1C2833"/>
+                </a:solidFill>
+                <a:latin typeface="Georgia" pitchFamily="34" charset="0"/>
+                <a:ea typeface="Georgia" pitchFamily="34" charset="-122"/>
+                <a:cs typeface="Georgia" pitchFamily="34" charset="-120"/>
+              </a:rPr>
+              <a:t>A named text: *</a:t>
+            </a:r>
+            <a:pPr algn="l" indent="0" marL="0">
+              <a:lnSpc>
+                <a:spcPts val="1820"/>
+              </a:lnSpc>
+              <a:spcBef>
+                <a:spcPts val="300"/>
+              </a:spcBef>
+              <a:spcAft>
+                <a:spcPts val="300"/>
+              </a:spcAft>
+              <a:buNone/>
+            </a:pPr>
+            <a:r>
+              <a:rPr lang="en-US" sz="1300" i="1" dirty="0">
+                <a:solidFill>
+                  <a:srgbClr val="1C2833"/>
+                </a:solidFill>
+                <a:latin typeface="Georgia" pitchFamily="34" charset="0"/>
+                <a:ea typeface="Georgia" pitchFamily="34" charset="-122"/>
+                <a:cs typeface="Georgia" pitchFamily="34" charset="-120"/>
+              </a:rPr>
+              <a:t>Bhāskara II's</a:t>
+            </a:r>
+            <a:pPr algn="l" indent="0" marL="0">
+              <a:lnSpc>
+                <a:spcPts val="1820"/>
+              </a:lnSpc>
+              <a:spcBef>
+                <a:spcPts val="300"/>
+              </a:spcBef>
+              <a:spcAft>
+                <a:spcPts val="300"/>
+              </a:spcAft>
+              <a:buNone/>
+            </a:pPr>
+            <a:r>
+              <a:rPr lang="en-US" sz="1300" dirty="0">
+                <a:solidFill>
+                  <a:srgbClr val="1C2833"/>
+                </a:solidFill>
+                <a:latin typeface="Georgia" pitchFamily="34" charset="0"/>
+                <a:ea typeface="Georgia" pitchFamily="34" charset="-122"/>
+                <a:cs typeface="Georgia" pitchFamily="34" charset="-120"/>
+              </a:rPr>
+              <a:t>Līlāvatī*** (1150 CE).</a:t>
+            </a:r>
+            <a:endParaRPr lang="en-US" sz="1300" dirty="0"/>
+          </a:p>
+        </p:txBody>
+      </p:sp>
+      <p:sp>
+        <p:nvSpPr>
+          <p:cNvPr id="13" name="Text 11"/>
+          <p:cNvSpPr/>
+          <p:nvPr/>
+        </p:nvSpPr>
+        <p:spPr>
+          <a:xfrm>
+            <a:off x="406301" y="4434929"/>
+            <a:ext cx="8498026" cy="213271"/>
+          </a:xfrm>
+          <a:prstGeom prst="rect">
+            <a:avLst/>
+          </a:prstGeom>
+          <a:noFill/>
+          <a:ln/>
+        </p:spPr>
+        <p:txBody>
+          <a:bodyPr wrap="square" lIns="0" tIns="0" rIns="0" bIns="0" rtlCol="0" anchor="t"/>
+          <a:lstStyle/>
+          <a:p>
+            <a:pPr algn="l" indent="0" marL="0">
+              <a:lnSpc>
+                <a:spcPts val="1680"/>
+              </a:lnSpc>
+              <a:spcBef>
+                <a:spcPts val="300"/>
+              </a:spcBef>
+              <a:spcAft>
+                <a:spcPts val="300"/>
+              </a:spcAft>
+              <a:buNone/>
+            </a:pPr>
+            <a:r>
+              <a:rPr lang="en-US" sz="1200" dirty="0">
+                <a:solidFill>
+                  <a:srgbClr val="1C2833"/>
+                </a:solidFill>
+                <a:latin typeface="Arial" pitchFamily="34" charset="0"/>
+                <a:ea typeface="Arial" pitchFamily="34" charset="-122"/>
+                <a:cs typeface="Arial" pitchFamily="34" charset="-120"/>
+              </a:rPr>
+              <a:t>Middle ·  · IKS Curriculum</a:t>
+            </a:r>
+            <a:endParaRPr lang="en-US" sz="1200" dirty="0"/>
+          </a:p>
+        </p:txBody>
+      </p:sp>
+    </p:spTree>
+  </p:cSld>
+  <p:clrMapOvr>
+    <a:masterClrMapping/>
+  </p:clrMapOvr>
+</p:sld>
+</file>
+
+<file path=ppt/slides/slide17.xml><?xml version="1.0" encoding="utf-8"?>
+<p:sld xmlns:a="http://schemas.openxmlformats.org/drawingml/2006/main" xmlns:r="http://schemas.openxmlformats.org/officeDocument/2006/relationships" xmlns:p="http://schemas.openxmlformats.org/presentationml/2006/main">
+  <p:cSld name="Slide 17">
+    <p:bg>
+      <p:bgPr>
+        <a:solidFill>
+          <a:srgbClr val="FFFFFF"/>
+        </a:solidFill>
+      </p:bgPr>
+    </p:bg>
+    <p:spTree>
+      <p:nvGrpSpPr>
+        <p:cNvPr id="1" name=""/>
+        <p:cNvGrpSpPr/>
+        <p:nvPr/>
+      </p:nvGrpSpPr>
+      <p:grpSpPr>
+        <a:xfrm>
+          <a:off x="0" y="0"/>
+          <a:ext cx="0" cy="0"/>
+          <a:chOff x="0" y="0"/>
+          <a:chExt cx="0" cy="0"/>
+        </a:xfrm>
+      </p:grpSpPr>
+      <p:sp>
+        <p:nvSpPr>
+          <p:cNvPr id="2" name="Text 0"/>
+          <p:cNvSpPr/>
+          <p:nvPr/>
+        </p:nvSpPr>
+        <p:spPr>
+          <a:xfrm>
+            <a:off x="0" y="0"/>
+            <a:ext cx="9144000" cy="101501"/>
+          </a:xfrm>
+          <a:prstGeom prst="rect">
+            <a:avLst/>
+          </a:prstGeom>
+          <a:solidFill>
+            <a:srgbClr val="277884"/>
+          </a:solidFill>
+          <a:ln/>
+        </p:spPr>
+        <p:txBody>
+          <a:bodyPr wrap="square" rtlCol="0" anchor="ctr"/>
+          <a:lstStyle/>
+          <a:p>
+            <a:pPr indent="0" marL="0">
+              <a:buNone/>
+            </a:pPr>
+            <a:endParaRPr lang="en-US" dirty="0"/>
+          </a:p>
+        </p:txBody>
+      </p:sp>
+      <p:sp>
+        <p:nvSpPr>
+          <p:cNvPr id="3" name="Text 1"/>
+          <p:cNvSpPr/>
+          <p:nvPr/>
+        </p:nvSpPr>
+        <p:spPr>
+          <a:xfrm>
+            <a:off x="406301" y="457051"/>
+            <a:ext cx="8498026" cy="274290"/>
+          </a:xfrm>
+          <a:prstGeom prst="rect">
+            <a:avLst/>
+          </a:prstGeom>
+          <a:noFill/>
+          <a:ln/>
+        </p:spPr>
+        <p:txBody>
+          <a:bodyPr wrap="square" lIns="0" tIns="0" rIns="0" bIns="0" rtlCol="0" anchor="t"/>
+          <a:lstStyle/>
+          <a:p>
+            <a:pPr algn="l" indent="0" marL="0">
+              <a:lnSpc>
+                <a:spcPts val="2160"/>
+              </a:lnSpc>
+              <a:spcBef>
+                <a:spcPts val="600"/>
+              </a:spcBef>
+              <a:spcAft>
+                <a:spcPts val="800"/>
+              </a:spcAft>
+              <a:buNone/>
+            </a:pPr>
+            <a:r>
+              <a:rPr lang="en-US" sz="1800" b="1" dirty="0">
+                <a:solidFill>
+                  <a:srgbClr val="FE4447"/>
+                </a:solidFill>
+                <a:latin typeface="Georgia" pitchFamily="34" charset="0"/>
+                <a:ea typeface="Georgia" pitchFamily="34" charset="-122"/>
+                <a:cs typeface="Georgia" pitchFamily="34" charset="-120"/>
+              </a:rPr>
+              <a:t>Homework</a:t>
+            </a:r>
+            <a:endParaRPr lang="en-US" sz="1800" dirty="0"/>
+          </a:p>
+        </p:txBody>
+      </p:sp>
+      <p:sp>
+        <p:nvSpPr>
+          <p:cNvPr id="4" name="Text 2"/>
+          <p:cNvSpPr/>
+          <p:nvPr/>
+        </p:nvSpPr>
+        <p:spPr>
+          <a:xfrm>
+            <a:off x="634901" y="883593"/>
+            <a:ext cx="8102798" cy="281880"/>
+          </a:xfrm>
+          <a:prstGeom prst="rect">
+            <a:avLst/>
+          </a:prstGeom>
+          <a:noFill/>
+          <a:ln/>
+        </p:spPr>
+        <p:txBody>
+          <a:bodyPr wrap="square" lIns="0" tIns="0" rIns="0" bIns="0" rtlCol="0" anchor="t"/>
+          <a:lstStyle/>
+          <a:p>
+            <a:pPr algn="l" marL="342900" indent="-342900">
+              <a:lnSpc>
+                <a:spcPts val="1620"/>
+              </a:lnSpc>
+              <a:spcAft>
+                <a:spcPts val="300"/>
+              </a:spcAft>
+              <a:buSzPct val="100000"/>
+              <a:buChar char="•"/>
+            </a:pPr>
+            <a:r>
+              <a:rPr lang="en-US" sz="1200" dirty="0">
+                <a:solidFill>
+                  <a:srgbClr val="1C2833"/>
+                </a:solidFill>
+                <a:latin typeface="Arial" pitchFamily="34" charset="0"/>
+                <a:ea typeface="Arial" pitchFamily="34" charset="-122"/>
+                <a:cs typeface="Arial" pitchFamily="34" charset="-120"/>
+              </a:rPr>
+              <a:t>Compute 10 terms of the Mādhava series for π. How close do you get?</a:t>
+            </a:r>
+            <a:endParaRPr lang="en-US" sz="1200" dirty="0"/>
+          </a:p>
+        </p:txBody>
+      </p:sp>
+      <p:sp>
+        <p:nvSpPr>
+          <p:cNvPr id="5" name="Text 3"/>
+          <p:cNvSpPr/>
+          <p:nvPr/>
+        </p:nvSpPr>
+        <p:spPr>
+          <a:xfrm>
+            <a:off x="406301" y="4434929"/>
+            <a:ext cx="8498026" cy="213271"/>
+          </a:xfrm>
+          <a:prstGeom prst="rect">
+            <a:avLst/>
+          </a:prstGeom>
+          <a:noFill/>
+          <a:ln/>
+        </p:spPr>
+        <p:txBody>
+          <a:bodyPr wrap="square" lIns="0" tIns="0" rIns="0" bIns="0" rtlCol="0" anchor="t"/>
+          <a:lstStyle/>
+          <a:p>
+            <a:pPr algn="l" indent="0" marL="0">
+              <a:lnSpc>
+                <a:spcPts val="1680"/>
+              </a:lnSpc>
+              <a:spcBef>
+                <a:spcPts val="300"/>
+              </a:spcBef>
+              <a:spcAft>
+                <a:spcPts val="300"/>
+              </a:spcAft>
+              <a:buNone/>
+            </a:pPr>
+            <a:r>
+              <a:rPr lang="en-US" sz="1200" dirty="0">
+                <a:solidFill>
+                  <a:srgbClr val="1C2833"/>
+                </a:solidFill>
+                <a:latin typeface="Arial" pitchFamily="34" charset="0"/>
+                <a:ea typeface="Arial" pitchFamily="34" charset="-122"/>
+                <a:cs typeface="Arial" pitchFamily="34" charset="-120"/>
+              </a:rPr>
+              <a:t>Middle ·  · IKS Curriculum</a:t>
+            </a:r>
+            <a:endParaRPr lang="en-US" sz="1200" dirty="0"/>
+          </a:p>
+        </p:txBody>
+      </p:sp>
+    </p:spTree>
+  </p:cSld>
+  <p:clrMapOvr>
+    <a:masterClrMapping/>
+  </p:clrMapOvr>
+</p:sld>
+</file>
+
+<file path=ppt/slides/slide18.xml><?xml version="1.0" encoding="utf-8"?>
+<p:sld xmlns:a="http://schemas.openxmlformats.org/drawingml/2006/main" xmlns:r="http://schemas.openxmlformats.org/officeDocument/2006/relationships" xmlns:p="http://schemas.openxmlformats.org/presentationml/2006/main">
+  <p:cSld name="Slide 18">
+    <p:bg>
+      <p:bgPr>
+        <a:solidFill>
+          <a:srgbClr val="FFFFFF"/>
+        </a:solidFill>
+      </p:bgPr>
+    </p:bg>
+    <p:spTree>
+      <p:nvGrpSpPr>
+        <p:cNvPr id="1" name=""/>
+        <p:cNvGrpSpPr/>
+        <p:nvPr/>
+      </p:nvGrpSpPr>
+      <p:grpSpPr>
+        <a:xfrm>
+          <a:off x="0" y="0"/>
+          <a:ext cx="0" cy="0"/>
+          <a:chOff x="0" y="0"/>
+          <a:chExt cx="0" cy="0"/>
+        </a:xfrm>
+      </p:grpSpPr>
+      <p:sp>
+        <p:nvSpPr>
+          <p:cNvPr id="2" name="Text 0"/>
+          <p:cNvSpPr/>
+          <p:nvPr/>
+        </p:nvSpPr>
+        <p:spPr>
+          <a:xfrm>
+            <a:off x="0" y="0"/>
+            <a:ext cx="9144000" cy="101501"/>
+          </a:xfrm>
+          <a:prstGeom prst="rect">
+            <a:avLst/>
+          </a:prstGeom>
+          <a:solidFill>
+            <a:srgbClr val="277884"/>
+          </a:solidFill>
+          <a:ln/>
+        </p:spPr>
+        <p:txBody>
+          <a:bodyPr wrap="square" rtlCol="0" anchor="ctr"/>
+          <a:lstStyle/>
+          <a:p>
+            <a:pPr indent="0" marL="0">
+              <a:buNone/>
+            </a:pPr>
+            <a:endParaRPr lang="en-US" dirty="0"/>
+          </a:p>
+        </p:txBody>
+      </p:sp>
+      <p:sp>
+        <p:nvSpPr>
+          <p:cNvPr id="3" name="Text 1"/>
+          <p:cNvSpPr/>
+          <p:nvPr/>
+        </p:nvSpPr>
+        <p:spPr>
+          <a:xfrm>
+            <a:off x="406301" y="457051"/>
+            <a:ext cx="8498026" cy="274290"/>
+          </a:xfrm>
+          <a:prstGeom prst="rect">
+            <a:avLst/>
+          </a:prstGeom>
+          <a:noFill/>
+          <a:ln/>
+        </p:spPr>
+        <p:txBody>
+          <a:bodyPr wrap="square" lIns="0" tIns="0" rIns="0" bIns="0" rtlCol="0" anchor="t"/>
+          <a:lstStyle/>
+          <a:p>
+            <a:pPr algn="l" indent="0" marL="0">
+              <a:lnSpc>
+                <a:spcPts val="2160"/>
+              </a:lnSpc>
+              <a:spcBef>
+                <a:spcPts val="600"/>
+              </a:spcBef>
+              <a:spcAft>
+                <a:spcPts val="800"/>
+              </a:spcAft>
+              <a:buNone/>
+            </a:pPr>
+            <a:r>
+              <a:rPr lang="en-US" sz="1800" b="1" dirty="0">
+                <a:solidFill>
+                  <a:srgbClr val="FE4447"/>
+                </a:solidFill>
+                <a:latin typeface="Georgia" pitchFamily="34" charset="0"/>
+                <a:ea typeface="Georgia" pitchFamily="34" charset="-122"/>
+                <a:cs typeface="Georgia" pitchFamily="34" charset="-120"/>
+              </a:rPr>
+              <a:t>Differentiation</a:t>
+            </a:r>
+            <a:endParaRPr lang="en-US" sz="1800" dirty="0"/>
+          </a:p>
+        </p:txBody>
+      </p:sp>
+      <p:sp>
+        <p:nvSpPr>
+          <p:cNvPr id="4" name="Text 2"/>
+          <p:cNvSpPr/>
+          <p:nvPr/>
+        </p:nvSpPr>
+        <p:spPr>
+          <a:xfrm>
+            <a:off x="634901" y="883593"/>
+            <a:ext cx="8102798" cy="525661"/>
+          </a:xfrm>
+          <a:prstGeom prst="rect">
+            <a:avLst/>
+          </a:prstGeom>
+          <a:noFill/>
+          <a:ln/>
+        </p:spPr>
+        <p:txBody>
+          <a:bodyPr wrap="square" lIns="0" tIns="0" rIns="0" bIns="0" rtlCol="0" anchor="t"/>
+          <a:lstStyle/>
+          <a:p>
+            <a:pPr algn="l" marL="342900" indent="-342900">
+              <a:lnSpc>
+                <a:spcPts val="1620"/>
+              </a:lnSpc>
+              <a:spcAft>
+                <a:spcPts val="300"/>
+              </a:spcAft>
+              <a:buSzPct val="100000"/>
+              <a:buChar char="•"/>
+            </a:pPr>
+            <a:r>
+              <a:rPr lang="en-US" sz="1200" b="1" dirty="0">
+                <a:solidFill>
+                  <a:srgbClr val="1C2833"/>
+                </a:solidFill>
+                <a:latin typeface="Arial" pitchFamily="34" charset="0"/>
+                <a:ea typeface="Arial" pitchFamily="34" charset="-122"/>
+                <a:cs typeface="Arial" pitchFamily="34" charset="-120"/>
+              </a:rPr>
+              <a:t>Tier up:</a:t>
+            </a:r>
+            <a:pPr algn="l" indent="0" marL="0">
+              <a:lnSpc>
+                <a:spcPts val="1620"/>
+              </a:lnSpc>
+              <a:spcAft>
+                <a:spcPts val="300"/>
+              </a:spcAft>
+              <a:buNone/>
+            </a:pPr>
+            <a:r>
+              <a:rPr lang="en-US" sz="1200" dirty="0">
+                <a:solidFill>
+                  <a:srgbClr val="1C2833"/>
+                </a:solidFill>
+                <a:latin typeface="Arial" pitchFamily="34" charset="0"/>
+                <a:ea typeface="Arial" pitchFamily="34" charset="-122"/>
+                <a:cs typeface="Arial" pitchFamily="34" charset="-120"/>
+              </a:rPr>
+              <a:t> Read about the Madhava-Leibniz attribution debate. Why is the European name still standard?</a:t>
+            </a:r>
+            <a:endParaRPr lang="en-US" sz="1200" dirty="0"/>
+          </a:p>
+          <a:p>
+            <a:pPr algn="l" marL="342900" indent="-342900">
+              <a:lnSpc>
+                <a:spcPts val="1620"/>
+              </a:lnSpc>
+              <a:spcAft>
+                <a:spcPts val="300"/>
+              </a:spcAft>
+              <a:buSzPct val="100000"/>
+              <a:buChar char="•"/>
+            </a:pPr>
+            <a:r>
+              <a:rPr lang="en-US" sz="1200" b="1" dirty="0">
+                <a:solidFill>
+                  <a:srgbClr val="1C2833"/>
+                </a:solidFill>
+                <a:latin typeface="Arial" pitchFamily="34" charset="0"/>
+                <a:ea typeface="Arial" pitchFamily="34" charset="-122"/>
+                <a:cs typeface="Arial" pitchFamily="34" charset="-120"/>
+              </a:rPr>
+              <a:t>Tier down:</a:t>
+            </a:r>
+            <a:pPr algn="l" indent="0" marL="0">
+              <a:lnSpc>
+                <a:spcPts val="1620"/>
+              </a:lnSpc>
+              <a:spcAft>
+                <a:spcPts val="300"/>
+              </a:spcAft>
+              <a:buNone/>
+            </a:pPr>
+            <a:r>
+              <a:rPr lang="en-US" sz="1200" dirty="0">
+                <a:solidFill>
+                  <a:srgbClr val="1C2833"/>
+                </a:solidFill>
+                <a:latin typeface="Arial" pitchFamily="34" charset="0"/>
+                <a:ea typeface="Arial" pitchFamily="34" charset="-122"/>
+                <a:cs typeface="Arial" pitchFamily="34" charset="-120"/>
+              </a:rPr>
+              <a:t> Just remember the three contributions + their approximate dates.</a:t>
+            </a:r>
+            <a:endParaRPr lang="en-US" sz="1200" dirty="0"/>
+          </a:p>
+        </p:txBody>
+      </p:sp>
+      <p:sp>
+        <p:nvSpPr>
+          <p:cNvPr id="5" name="Text 3"/>
+          <p:cNvSpPr/>
+          <p:nvPr/>
+        </p:nvSpPr>
+        <p:spPr>
+          <a:xfrm>
+            <a:off x="406301" y="4434929"/>
+            <a:ext cx="8498026" cy="213271"/>
+          </a:xfrm>
+          <a:prstGeom prst="rect">
+            <a:avLst/>
+          </a:prstGeom>
+          <a:noFill/>
+          <a:ln/>
+        </p:spPr>
+        <p:txBody>
+          <a:bodyPr wrap="square" lIns="0" tIns="0" rIns="0" bIns="0" rtlCol="0" anchor="t"/>
+          <a:lstStyle/>
+          <a:p>
+            <a:pPr algn="l" indent="0" marL="0">
+              <a:lnSpc>
+                <a:spcPts val="1680"/>
+              </a:lnSpc>
+              <a:spcBef>
+                <a:spcPts val="300"/>
+              </a:spcBef>
+              <a:spcAft>
+                <a:spcPts val="300"/>
+              </a:spcAft>
+              <a:buNone/>
+            </a:pPr>
+            <a:r>
+              <a:rPr lang="en-US" sz="1200" dirty="0">
+                <a:solidFill>
+                  <a:srgbClr val="1C2833"/>
+                </a:solidFill>
+                <a:latin typeface="Arial" pitchFamily="34" charset="0"/>
+                <a:ea typeface="Arial" pitchFamily="34" charset="-122"/>
+                <a:cs typeface="Arial" pitchFamily="34" charset="-120"/>
+              </a:rPr>
+              <a:t>Middle ·  · IKS Curriculum</a:t>
+            </a:r>
+            <a:endParaRPr lang="en-US" sz="1200" dirty="0"/>
+          </a:p>
+        </p:txBody>
+      </p:sp>
+    </p:spTree>
+  </p:cSld>
+  <p:clrMapOvr>
+    <a:masterClrMapping/>
+  </p:clrMapOvr>
+</p:sld>
+</file>
+
+<file path=ppt/slides/slide19.xml><?xml version="1.0" encoding="utf-8"?>
+<p:sld xmlns:a="http://schemas.openxmlformats.org/drawingml/2006/main" xmlns:r="http://schemas.openxmlformats.org/officeDocument/2006/relationships" xmlns:p="http://schemas.openxmlformats.org/presentationml/2006/main">
+  <p:cSld name="Slide 19">
+    <p:bg>
+      <p:bgPr>
+        <a:solidFill>
+          <a:srgbClr val="FFFFFF"/>
+        </a:solidFill>
+      </p:bgPr>
+    </p:bg>
+    <p:spTree>
+      <p:nvGrpSpPr>
+        <p:cNvPr id="1" name=""/>
+        <p:cNvGrpSpPr/>
+        <p:nvPr/>
+      </p:nvGrpSpPr>
+      <p:grpSpPr>
+        <a:xfrm>
+          <a:off x="0" y="0"/>
+          <a:ext cx="0" cy="0"/>
+          <a:chOff x="0" y="0"/>
+          <a:chExt cx="0" cy="0"/>
+        </a:xfrm>
+      </p:grpSpPr>
+      <p:sp>
+        <p:nvSpPr>
+          <p:cNvPr id="2" name="Text 0"/>
+          <p:cNvSpPr/>
+          <p:nvPr/>
+        </p:nvSpPr>
+        <p:spPr>
+          <a:xfrm>
+            <a:off x="0" y="0"/>
+            <a:ext cx="9144000" cy="101501"/>
+          </a:xfrm>
+          <a:prstGeom prst="rect">
+            <a:avLst/>
+          </a:prstGeom>
+          <a:solidFill>
+            <a:srgbClr val="277884"/>
+          </a:solidFill>
+          <a:ln/>
+        </p:spPr>
+        <p:txBody>
+          <a:bodyPr wrap="square" rtlCol="0" anchor="ctr"/>
+          <a:lstStyle/>
+          <a:p>
+            <a:pPr indent="0" marL="0">
+              <a:buNone/>
+            </a:pPr>
+            <a:endParaRPr lang="en-US" dirty="0"/>
+          </a:p>
+        </p:txBody>
+      </p:sp>
+      <p:sp>
+        <p:nvSpPr>
+          <p:cNvPr id="3" name="Text 1"/>
+          <p:cNvSpPr/>
+          <p:nvPr/>
+        </p:nvSpPr>
+        <p:spPr>
+          <a:xfrm>
+            <a:off x="406301" y="457051"/>
+            <a:ext cx="8498026" cy="274290"/>
+          </a:xfrm>
+          <a:prstGeom prst="rect">
+            <a:avLst/>
+          </a:prstGeom>
+          <a:noFill/>
+          <a:ln/>
+        </p:spPr>
+        <p:txBody>
+          <a:bodyPr wrap="square" lIns="0" tIns="0" rIns="0" bIns="0" rtlCol="0" anchor="t"/>
+          <a:lstStyle/>
+          <a:p>
+            <a:pPr algn="l" indent="0" marL="0">
+              <a:lnSpc>
+                <a:spcPts val="2160"/>
+              </a:lnSpc>
+              <a:spcBef>
+                <a:spcPts val="600"/>
+              </a:spcBef>
+              <a:spcAft>
+                <a:spcPts val="800"/>
+              </a:spcAft>
+              <a:buNone/>
+            </a:pPr>
+            <a:r>
+              <a:rPr lang="en-US" sz="1800" b="1" dirty="0">
+                <a:solidFill>
+                  <a:srgbClr val="FE4447"/>
+                </a:solidFill>
+                <a:latin typeface="Georgia" pitchFamily="34" charset="0"/>
+                <a:ea typeface="Georgia" pitchFamily="34" charset="-122"/>
+                <a:cs typeface="Georgia" pitchFamily="34" charset="-120"/>
+              </a:rPr>
+              <a:t>Teacher notes</a:t>
+            </a:r>
+            <a:endParaRPr lang="en-US" sz="1800" dirty="0"/>
+          </a:p>
+        </p:txBody>
+      </p:sp>
+      <p:sp>
+        <p:nvSpPr>
+          <p:cNvPr id="4" name="Text 2"/>
+          <p:cNvSpPr/>
+          <p:nvPr/>
+        </p:nvSpPr>
+        <p:spPr>
+          <a:xfrm>
+            <a:off x="634901" y="883593"/>
+            <a:ext cx="8102798" cy="937022"/>
+          </a:xfrm>
+          <a:prstGeom prst="rect">
+            <a:avLst/>
+          </a:prstGeom>
+          <a:noFill/>
+          <a:ln/>
+        </p:spPr>
+        <p:txBody>
+          <a:bodyPr wrap="square" lIns="0" tIns="0" rIns="0" bIns="0" rtlCol="0" anchor="t"/>
+          <a:lstStyle/>
+          <a:p>
+            <a:pPr algn="l" marL="342900" indent="-342900">
+              <a:lnSpc>
+                <a:spcPts val="1620"/>
+              </a:lnSpc>
+              <a:spcAft>
+                <a:spcPts val="300"/>
+              </a:spcAft>
+              <a:buSzPct val="100000"/>
+              <a:buChar char="•"/>
+            </a:pPr>
+            <a:r>
+              <a:rPr lang="en-US" sz="1200" dirty="0">
+                <a:solidFill>
+                  <a:srgbClr val="1C2833"/>
+                </a:solidFill>
+                <a:latin typeface="Arial" pitchFamily="34" charset="0"/>
+                <a:ea typeface="Arial" pitchFamily="34" charset="-122"/>
+                <a:cs typeface="Arial" pitchFamily="34" charset="-120"/>
+              </a:rPr>
+              <a:t>The Leibniz-Mādhava attribution is a recurring honest-credit issue. Mainstream math history is increasingly correcting this; some textbooks now use "Madhava-Leibniz series."</a:t>
+            </a:r>
+            <a:endParaRPr lang="en-US" sz="1200" dirty="0"/>
+          </a:p>
+          <a:p>
+            <a:pPr algn="l" marL="342900" indent="-342900">
+              <a:lnSpc>
+                <a:spcPts val="1620"/>
+              </a:lnSpc>
+              <a:spcAft>
+                <a:spcPts val="300"/>
+              </a:spcAft>
+              <a:buSzPct val="100000"/>
+              <a:buChar char="•"/>
+            </a:pPr>
+            <a:r>
+              <a:rPr lang="en-US" sz="1200" dirty="0">
+                <a:solidFill>
+                  <a:srgbClr val="1C2833"/>
+                </a:solidFill>
+                <a:latin typeface="Arial" pitchFamily="34" charset="0"/>
+                <a:ea typeface="Arial" pitchFamily="34" charset="-122"/>
+                <a:cs typeface="Arial" pitchFamily="34" charset="-120"/>
+              </a:rPr>
+              <a:t>Bhāskara II's </a:t>
+            </a:r>
+            <a:pPr algn="l" indent="0" marL="0">
+              <a:lnSpc>
+                <a:spcPts val="1620"/>
+              </a:lnSpc>
+              <a:spcAft>
+                <a:spcPts val="300"/>
+              </a:spcAft>
+              <a:buNone/>
+            </a:pPr>
+            <a:r>
+              <a:rPr lang="en-US" sz="1200" i="1" dirty="0">
+                <a:solidFill>
+                  <a:srgbClr val="1C2833"/>
+                </a:solidFill>
+                <a:latin typeface="Arial" pitchFamily="34" charset="0"/>
+                <a:ea typeface="Arial" pitchFamily="34" charset="-122"/>
+                <a:cs typeface="Arial" pitchFamily="34" charset="-120"/>
+              </a:rPr>
+              <a:t>Līlāvatī</a:t>
+            </a:r>
+            <a:pPr algn="l" indent="0" marL="0">
+              <a:lnSpc>
+                <a:spcPts val="1620"/>
+              </a:lnSpc>
+              <a:spcAft>
+                <a:spcPts val="300"/>
+              </a:spcAft>
+              <a:buNone/>
+            </a:pPr>
+            <a:r>
+              <a:rPr lang="en-US" sz="1200" dirty="0">
+                <a:solidFill>
+                  <a:srgbClr val="1C2833"/>
+                </a:solidFill>
+                <a:latin typeface="Arial" pitchFamily="34" charset="0"/>
+                <a:ea typeface="Arial" pitchFamily="34" charset="-122"/>
+                <a:cs typeface="Arial" pitchFamily="34" charset="-120"/>
+              </a:rPr>
+              <a:t> problems are charming — many are presented as little stories. If time permits, read one or two more.</a:t>
             </a:r>
             <a:endParaRPr lang="en-US" sz="1200" dirty="0"/>
           </a:p>
@@ -3361,7 +6053,7 @@
                 <a:ea typeface="Georgia" pitchFamily="34" charset="-122"/>
                 <a:cs typeface="Georgia" pitchFamily="34" charset="-120"/>
               </a:rPr>
-              <a:t>Materials</a:t>
+              <a:t>Learning objective</a:t>
             </a:r>
             <a:endParaRPr lang="en-US" sz="1800" dirty="0"/>
           </a:p>
@@ -3409,8 +6101,33 @@
                 <a:ea typeface="Arial" pitchFamily="34" charset="-122"/>
                 <a:cs typeface="Arial" pitchFamily="34" charset="-120"/>
               </a:rPr>
-              <a:t>– Whiteboard – Printed extract: 1 verse from Bhāskara II's </a:t>
-            </a:r>
+              <a:t>Students name 3 specific Indian mathematical contributions with dates and articulate why each matters.</a:t>
+            </a:r>
+            <a:endParaRPr lang="en-US" sz="1200" dirty="0"/>
+          </a:p>
+        </p:txBody>
+      </p:sp>
+      <p:sp>
+        <p:nvSpPr>
+          <p:cNvPr id="5" name="Text 3"/>
+          <p:cNvSpPr/>
+          <p:nvPr/>
+        </p:nvSpPr>
+        <p:spPr>
+          <a:xfrm>
+            <a:off x="406301" y="4434929"/>
+            <a:ext cx="8498026" cy="213271"/>
+          </a:xfrm>
+          <a:prstGeom prst="rect">
+            <a:avLst/>
+          </a:prstGeom>
+          <a:noFill/>
+          <a:ln/>
+        </p:spPr>
+        <p:txBody>
+          <a:bodyPr wrap="square" lIns="0" tIns="0" rIns="0" bIns="0" rtlCol="0" anchor="t"/>
+          <a:lstStyle/>
+          <a:p>
             <a:pPr algn="l" indent="0" marL="0">
               <a:lnSpc>
                 <a:spcPts val="1680"/>
@@ -3424,7 +6141,7 @@
               <a:buNone/>
             </a:pPr>
             <a:r>
-              <a:rPr lang="en-US" sz="1200" i="1" dirty="0">
+              <a:rPr lang="en-US" sz="1200" dirty="0">
                 <a:solidFill>
                   <a:srgbClr val="1C2833"/>
                 </a:solidFill>
@@ -3432,19 +6149,152 @@
                 <a:ea typeface="Arial" pitchFamily="34" charset="-122"/>
                 <a:cs typeface="Arial" pitchFamily="34" charset="-120"/>
               </a:rPr>
-              <a:t>Līlāvatī</a:t>
-            </a:r>
+              <a:t>Middle ·  · IKS Curriculum</a:t>
+            </a:r>
+            <a:endParaRPr lang="en-US" sz="1200" dirty="0"/>
+          </a:p>
+        </p:txBody>
+      </p:sp>
+    </p:spTree>
+  </p:cSld>
+  <p:clrMapOvr>
+    <a:masterClrMapping/>
+  </p:clrMapOvr>
+</p:sld>
+</file>
+
+<file path=ppt/slides/slide20.xml><?xml version="1.0" encoding="utf-8"?>
+<p:sld xmlns:a="http://schemas.openxmlformats.org/drawingml/2006/main" xmlns:r="http://schemas.openxmlformats.org/officeDocument/2006/relationships" xmlns:p="http://schemas.openxmlformats.org/presentationml/2006/main">
+  <p:cSld name="Slide 20">
+    <p:bg>
+      <p:bgPr>
+        <a:solidFill>
+          <a:srgbClr val="FFFFFF"/>
+        </a:solidFill>
+      </p:bgPr>
+    </p:bg>
+    <p:spTree>
+      <p:nvGrpSpPr>
+        <p:cNvPr id="1" name=""/>
+        <p:cNvGrpSpPr/>
+        <p:nvPr/>
+      </p:nvGrpSpPr>
+      <p:grpSpPr>
+        <a:xfrm>
+          <a:off x="0" y="0"/>
+          <a:ext cx="0" cy="0"/>
+          <a:chOff x="0" y="0"/>
+          <a:chExt cx="0" cy="0"/>
+        </a:xfrm>
+      </p:grpSpPr>
+      <p:sp>
+        <p:nvSpPr>
+          <p:cNvPr id="2" name="Text 0"/>
+          <p:cNvSpPr/>
+          <p:nvPr/>
+        </p:nvSpPr>
+        <p:spPr>
+          <a:xfrm>
+            <a:off x="0" y="0"/>
+            <a:ext cx="9144000" cy="101501"/>
+          </a:xfrm>
+          <a:prstGeom prst="rect">
+            <a:avLst/>
+          </a:prstGeom>
+          <a:solidFill>
+            <a:srgbClr val="277884"/>
+          </a:solidFill>
+          <a:ln/>
+        </p:spPr>
+        <p:txBody>
+          <a:bodyPr wrap="square" rtlCol="0" anchor="ctr"/>
+          <a:lstStyle/>
+          <a:p>
+            <a:pPr indent="0" marL="0">
+              <a:buNone/>
+            </a:pPr>
+            <a:endParaRPr lang="en-US" dirty="0"/>
+          </a:p>
+        </p:txBody>
+      </p:sp>
+      <p:sp>
+        <p:nvSpPr>
+          <p:cNvPr id="3" name="Text 1"/>
+          <p:cNvSpPr/>
+          <p:nvPr/>
+        </p:nvSpPr>
+        <p:spPr>
+          <a:xfrm>
+            <a:off x="406301" y="457051"/>
+            <a:ext cx="8498026" cy="274290"/>
+          </a:xfrm>
+          <a:prstGeom prst="rect">
+            <a:avLst/>
+          </a:prstGeom>
+          <a:noFill/>
+          <a:ln/>
+        </p:spPr>
+        <p:txBody>
+          <a:bodyPr wrap="square" lIns="0" tIns="0" rIns="0" bIns="0" rtlCol="0" anchor="t"/>
+          <a:lstStyle/>
+          <a:p>
             <a:pPr algn="l" indent="0" marL="0">
               <a:lnSpc>
-                <a:spcPts val="1680"/>
+                <a:spcPts val="2160"/>
               </a:lnSpc>
               <a:spcBef>
-                <a:spcPts val="300"/>
+                <a:spcPts val="600"/>
               </a:spcBef>
               <a:spcAft>
-                <a:spcPts val="300"/>
-              </a:spcAft>
-              <a:buNone/>
+                <a:spcPts val="800"/>
+              </a:spcAft>
+              <a:buNone/>
+            </a:pPr>
+            <a:r>
+              <a:rPr lang="en-US" sz="1800" b="1" dirty="0">
+                <a:solidFill>
+                  <a:srgbClr val="FE4447"/>
+                </a:solidFill>
+                <a:latin typeface="Georgia" pitchFamily="34" charset="0"/>
+                <a:ea typeface="Georgia" pitchFamily="34" charset="-122"/>
+                <a:cs typeface="Georgia" pitchFamily="34" charset="-120"/>
+              </a:rPr>
+              <a:t>Citation(s) used</a:t>
+            </a:r>
+            <a:endParaRPr lang="en-US" sz="1800" dirty="0"/>
+          </a:p>
+        </p:txBody>
+      </p:sp>
+      <p:sp>
+        <p:nvSpPr>
+          <p:cNvPr id="4" name="Text 2"/>
+          <p:cNvSpPr/>
+          <p:nvPr/>
+        </p:nvSpPr>
+        <p:spPr>
+          <a:xfrm>
+            <a:off x="634901" y="883593"/>
+            <a:ext cx="8102798" cy="769441"/>
+          </a:xfrm>
+          <a:prstGeom prst="rect">
+            <a:avLst/>
+          </a:prstGeom>
+          <a:noFill/>
+          <a:ln/>
+        </p:spPr>
+        <p:txBody>
+          <a:bodyPr wrap="square" lIns="0" tIns="0" rIns="0" bIns="0" rtlCol="0" anchor="t"/>
+          <a:lstStyle/>
+          <a:p>
+            <a:pPr algn="l" marL="342900" indent="-342900">
+              <a:lnSpc>
+                <a:spcPts val="1620"/>
+              </a:lnSpc>
+              <a:spcAft>
+                <a:spcPts val="300"/>
+              </a:spcAft>
+              <a:buSzPct val="100000"/>
+              <a:buChar char="•"/>
             </a:pPr>
             <a:r>
               <a:rPr lang="en-US" sz="1200" dirty="0">
@@ -3455,7 +6305,95 @@
                 <a:ea typeface="Arial" pitchFamily="34" charset="-122"/>
                 <a:cs typeface="Arial" pitchFamily="34" charset="-120"/>
               </a:rPr>
-              <a:t> (12th c. CE) in translation</a:t>
+              <a:t>Plofker (2009), Chapters 4–7.</a:t>
+            </a:r>
+            <a:endParaRPr lang="en-US" sz="1200" dirty="0"/>
+          </a:p>
+          <a:p>
+            <a:pPr algn="l" marL="342900" indent="-342900">
+              <a:lnSpc>
+                <a:spcPts val="1620"/>
+              </a:lnSpc>
+              <a:spcAft>
+                <a:spcPts val="300"/>
+              </a:spcAft>
+              <a:buSzPct val="100000"/>
+              <a:buChar char="•"/>
+            </a:pPr>
+            <a:r>
+              <a:rPr lang="en-US" sz="1200" dirty="0">
+                <a:solidFill>
+                  <a:srgbClr val="1C2833"/>
+                </a:solidFill>
+                <a:latin typeface="Arial" pitchFamily="34" charset="0"/>
+                <a:ea typeface="Arial" pitchFamily="34" charset="-122"/>
+                <a:cs typeface="Arial" pitchFamily="34" charset="-120"/>
+              </a:rPr>
+              <a:t>Bhāskara II, </a:t>
+            </a:r>
+            <a:pPr algn="l" indent="0" marL="0">
+              <a:lnSpc>
+                <a:spcPts val="1620"/>
+              </a:lnSpc>
+              <a:spcAft>
+                <a:spcPts val="300"/>
+              </a:spcAft>
+              <a:buNone/>
+            </a:pPr>
+            <a:r>
+              <a:rPr lang="en-US" sz="1200" i="1" dirty="0">
+                <a:solidFill>
+                  <a:srgbClr val="1C2833"/>
+                </a:solidFill>
+                <a:latin typeface="Arial" pitchFamily="34" charset="0"/>
+                <a:ea typeface="Arial" pitchFamily="34" charset="-122"/>
+                <a:cs typeface="Arial" pitchFamily="34" charset="-120"/>
+              </a:rPr>
+              <a:t>Līlāvatī</a:t>
+            </a:r>
+            <a:pPr algn="l" indent="0" marL="0">
+              <a:lnSpc>
+                <a:spcPts val="1620"/>
+              </a:lnSpc>
+              <a:spcAft>
+                <a:spcPts val="300"/>
+              </a:spcAft>
+              <a:buNone/>
+            </a:pPr>
+            <a:r>
+              <a:rPr lang="en-US" sz="1200" dirty="0">
+                <a:solidFill>
+                  <a:srgbClr val="1C2833"/>
+                </a:solidFill>
+                <a:latin typeface="Arial" pitchFamily="34" charset="0"/>
+                <a:ea typeface="Arial" pitchFamily="34" charset="-122"/>
+                <a:cs typeface="Arial" pitchFamily="34" charset="-120"/>
+              </a:rPr>
+              <a:t> (1150 CE) — translation by Colebrooke (1817) or Patwardhan, Naimpally, Singh (2001).</a:t>
+            </a:r>
+            <a:endParaRPr lang="en-US" sz="1200" dirty="0"/>
+          </a:p>
+          <a:p>
+            <a:pPr algn="l" marL="342900" indent="-342900">
+              <a:lnSpc>
+                <a:spcPts val="1620"/>
+              </a:lnSpc>
+              <a:spcAft>
+                <a:spcPts val="300"/>
+              </a:spcAft>
+              <a:buSzPct val="100000"/>
+              <a:buChar char="•"/>
+            </a:pPr>
+            <a:r>
+              <a:rPr lang="en-US" sz="1200" dirty="0">
+                <a:solidFill>
+                  <a:srgbClr val="1C2833"/>
+                </a:solidFill>
+                <a:latin typeface="Arial" pitchFamily="34" charset="0"/>
+                <a:ea typeface="Arial" pitchFamily="34" charset="-122"/>
+                <a:cs typeface="Arial" pitchFamily="34" charset="-120"/>
+              </a:rPr>
+              <a:t>Hayashi (1995) on the Bakhshali manuscript.</a:t>
             </a:r>
             <a:endParaRPr lang="en-US" sz="1200" dirty="0"/>
           </a:p>
@@ -3613,7 +6551,7 @@
                 <a:ea typeface="Georgia" pitchFamily="34" charset="-122"/>
                 <a:cs typeface="Georgia" pitchFamily="34" charset="-120"/>
               </a:rPr>
-              <a:t>Vocabulary</a:t>
+              <a:t>Materials</a:t>
             </a:r>
             <a:endParaRPr lang="en-US" sz="1800" dirty="0"/>
           </a:p>
@@ -3628,7 +6566,7 @@
         <p:spPr>
           <a:xfrm>
             <a:off x="634901" y="883593"/>
-            <a:ext cx="8102798" cy="769441"/>
+            <a:ext cx="8102798" cy="525661"/>
           </a:xfrm>
           <a:prstGeom prst="rect">
             <a:avLst/>
@@ -3651,7 +6589,7 @@
               <a:buChar char="•"/>
             </a:pPr>
             <a:r>
-              <a:rPr lang="en-US" sz="1200" i="1" dirty="0">
+              <a:rPr lang="en-US" sz="1200" dirty="0">
                 <a:solidFill>
                   <a:srgbClr val="1C2833"/>
                 </a:solidFill>
@@ -3659,16 +6597,20 @@
                 <a:ea typeface="Arial" pitchFamily="34" charset="-122"/>
                 <a:cs typeface="Arial" pitchFamily="34" charset="-120"/>
               </a:rPr>
-              <a:t>gaṇita</a:t>
-            </a:r>
-            <a:pPr algn="l" indent="0" marL="0">
+              <a:t>Whiteboard</a:t>
+            </a:r>
+            <a:endParaRPr lang="en-US" sz="1200" dirty="0"/>
+          </a:p>
+          <a:p>
+            <a:pPr algn="l" marL="342900" indent="-342900">
               <a:lnSpc>
                 <a:spcPts val="1620"/>
               </a:lnSpc>
               <a:spcAft>
                 <a:spcPts val="300"/>
               </a:spcAft>
-              <a:buNone/>
+              <a:buSzPct val="100000"/>
+              <a:buChar char="•"/>
             </a:pPr>
             <a:r>
               <a:rPr lang="en-US" sz="1200" dirty="0">
@@ -3679,20 +6621,16 @@
                 <a:ea typeface="Arial" pitchFamily="34" charset="-122"/>
                 <a:cs typeface="Arial" pitchFamily="34" charset="-120"/>
               </a:rPr>
-              <a:t> — "calculation, mathematics"</a:t>
-            </a:r>
-            <a:endParaRPr lang="en-US" sz="1200" dirty="0"/>
-          </a:p>
-          <a:p>
-            <a:pPr algn="l" marL="342900" indent="-342900">
+              <a:t>Printed extract: 1 verse from Bhāskara II's </a:t>
+            </a:r>
+            <a:pPr algn="l" indent="0" marL="0">
               <a:lnSpc>
                 <a:spcPts val="1620"/>
               </a:lnSpc>
               <a:spcAft>
                 <a:spcPts val="300"/>
               </a:spcAft>
-              <a:buSzPct val="100000"/>
-              <a:buChar char="•"/>
+              <a:buNone/>
             </a:pPr>
             <a:r>
               <a:rPr lang="en-US" sz="1200" i="1" dirty="0">
@@ -3703,7 +6641,7 @@
                 <a:ea typeface="Arial" pitchFamily="34" charset="-122"/>
                 <a:cs typeface="Arial" pitchFamily="34" charset="-120"/>
               </a:rPr>
-              <a:t>śūnya</a:t>
+              <a:t>Līlāvatī</a:t>
             </a:r>
             <a:pPr algn="l" indent="0" marL="0">
               <a:lnSpc>
@@ -3723,51 +6661,7 @@
                 <a:ea typeface="Arial" pitchFamily="34" charset="-122"/>
                 <a:cs typeface="Arial" pitchFamily="34" charset="-120"/>
               </a:rPr>
-              <a:t> — "zero, void"</a:t>
-            </a:r>
-            <a:endParaRPr lang="en-US" sz="1200" dirty="0"/>
-          </a:p>
-          <a:p>
-            <a:pPr algn="l" marL="342900" indent="-342900">
-              <a:lnSpc>
-                <a:spcPts val="1620"/>
-              </a:lnSpc>
-              <a:spcAft>
-                <a:spcPts val="300"/>
-              </a:spcAft>
-              <a:buSzPct val="100000"/>
-              <a:buChar char="•"/>
-            </a:pPr>
-            <a:r>
-              <a:rPr lang="en-US" sz="1200" i="1" dirty="0">
-                <a:solidFill>
-                  <a:srgbClr val="1C2833"/>
-                </a:solidFill>
-                <a:latin typeface="Arial" pitchFamily="34" charset="0"/>
-                <a:ea typeface="Arial" pitchFamily="34" charset="-122"/>
-                <a:cs typeface="Arial" pitchFamily="34" charset="-120"/>
-              </a:rPr>
-              <a:t>aṅka</a:t>
-            </a:r>
-            <a:pPr algn="l" indent="0" marL="0">
-              <a:lnSpc>
-                <a:spcPts val="1620"/>
-              </a:lnSpc>
-              <a:spcAft>
-                <a:spcPts val="300"/>
-              </a:spcAft>
-              <a:buNone/>
-            </a:pPr>
-            <a:r>
-              <a:rPr lang="en-US" sz="1200" dirty="0">
-                <a:solidFill>
-                  <a:srgbClr val="1C2833"/>
-                </a:solidFill>
-                <a:latin typeface="Arial" pitchFamily="34" charset="0"/>
-                <a:ea typeface="Arial" pitchFamily="34" charset="-122"/>
-                <a:cs typeface="Arial" pitchFamily="34" charset="-120"/>
-              </a:rPr>
-              <a:t> — "digit"</a:t>
+              <a:t> (12th c. CE) in translation</a:t>
             </a:r>
             <a:endParaRPr lang="en-US" sz="1200" dirty="0"/>
           </a:p>
@@ -3925,7 +6819,7 @@
                 <a:ea typeface="Georgia" pitchFamily="34" charset="-122"/>
                 <a:cs typeface="Georgia" pitchFamily="34" charset="-120"/>
               </a:rPr>
-              <a:t>Flow</a:t>
+              <a:t>Vocabulary</a:t>
             </a:r>
             <a:endParaRPr lang="en-US" sz="1800" dirty="0"/>
           </a:p>
@@ -3934,6 +6828,160 @@
       <p:sp>
         <p:nvSpPr>
           <p:cNvPr id="4" name="Text 2"/>
+          <p:cNvSpPr/>
+          <p:nvPr/>
+        </p:nvSpPr>
+        <p:spPr>
+          <a:xfrm>
+            <a:off x="634901" y="883593"/>
+            <a:ext cx="8102798" cy="769441"/>
+          </a:xfrm>
+          <a:prstGeom prst="rect">
+            <a:avLst/>
+          </a:prstGeom>
+          <a:noFill/>
+          <a:ln/>
+        </p:spPr>
+        <p:txBody>
+          <a:bodyPr wrap="square" lIns="0" tIns="0" rIns="0" bIns="0" rtlCol="0" anchor="t"/>
+          <a:lstStyle/>
+          <a:p>
+            <a:pPr algn="l" marL="342900" indent="-342900">
+              <a:lnSpc>
+                <a:spcPts val="1620"/>
+              </a:lnSpc>
+              <a:spcAft>
+                <a:spcPts val="300"/>
+              </a:spcAft>
+              <a:buSzPct val="100000"/>
+              <a:buChar char="•"/>
+            </a:pPr>
+            <a:r>
+              <a:rPr lang="en-US" sz="1200" i="1" dirty="0">
+                <a:solidFill>
+                  <a:srgbClr val="1C2833"/>
+                </a:solidFill>
+                <a:latin typeface="Arial" pitchFamily="34" charset="0"/>
+                <a:ea typeface="Arial" pitchFamily="34" charset="-122"/>
+                <a:cs typeface="Arial" pitchFamily="34" charset="-120"/>
+              </a:rPr>
+              <a:t>gaṇita</a:t>
+            </a:r>
+            <a:pPr algn="l" indent="0" marL="0">
+              <a:lnSpc>
+                <a:spcPts val="1620"/>
+              </a:lnSpc>
+              <a:spcAft>
+                <a:spcPts val="300"/>
+              </a:spcAft>
+              <a:buNone/>
+            </a:pPr>
+            <a:r>
+              <a:rPr lang="en-US" sz="1200" dirty="0">
+                <a:solidFill>
+                  <a:srgbClr val="1C2833"/>
+                </a:solidFill>
+                <a:latin typeface="Arial" pitchFamily="34" charset="0"/>
+                <a:ea typeface="Arial" pitchFamily="34" charset="-122"/>
+                <a:cs typeface="Arial" pitchFamily="34" charset="-120"/>
+              </a:rPr>
+              <a:t> — "calculation, mathematics"</a:t>
+            </a:r>
+            <a:endParaRPr lang="en-US" sz="1200" dirty="0"/>
+          </a:p>
+          <a:p>
+            <a:pPr algn="l" marL="342900" indent="-342900">
+              <a:lnSpc>
+                <a:spcPts val="1620"/>
+              </a:lnSpc>
+              <a:spcAft>
+                <a:spcPts val="300"/>
+              </a:spcAft>
+              <a:buSzPct val="100000"/>
+              <a:buChar char="•"/>
+            </a:pPr>
+            <a:r>
+              <a:rPr lang="en-US" sz="1200" i="1" dirty="0">
+                <a:solidFill>
+                  <a:srgbClr val="1C2833"/>
+                </a:solidFill>
+                <a:latin typeface="Arial" pitchFamily="34" charset="0"/>
+                <a:ea typeface="Arial" pitchFamily="34" charset="-122"/>
+                <a:cs typeface="Arial" pitchFamily="34" charset="-120"/>
+              </a:rPr>
+              <a:t>śūnya</a:t>
+            </a:r>
+            <a:pPr algn="l" indent="0" marL="0">
+              <a:lnSpc>
+                <a:spcPts val="1620"/>
+              </a:lnSpc>
+              <a:spcAft>
+                <a:spcPts val="300"/>
+              </a:spcAft>
+              <a:buNone/>
+            </a:pPr>
+            <a:r>
+              <a:rPr lang="en-US" sz="1200" dirty="0">
+                <a:solidFill>
+                  <a:srgbClr val="1C2833"/>
+                </a:solidFill>
+                <a:latin typeface="Arial" pitchFamily="34" charset="0"/>
+                <a:ea typeface="Arial" pitchFamily="34" charset="-122"/>
+                <a:cs typeface="Arial" pitchFamily="34" charset="-120"/>
+              </a:rPr>
+              <a:t> — "zero, void"</a:t>
+            </a:r>
+            <a:endParaRPr lang="en-US" sz="1200" dirty="0"/>
+          </a:p>
+          <a:p>
+            <a:pPr algn="l" marL="342900" indent="-342900">
+              <a:lnSpc>
+                <a:spcPts val="1620"/>
+              </a:lnSpc>
+              <a:spcAft>
+                <a:spcPts val="300"/>
+              </a:spcAft>
+              <a:buSzPct val="100000"/>
+              <a:buChar char="•"/>
+            </a:pPr>
+            <a:r>
+              <a:rPr lang="en-US" sz="1200" i="1" dirty="0">
+                <a:solidFill>
+                  <a:srgbClr val="1C2833"/>
+                </a:solidFill>
+                <a:latin typeface="Arial" pitchFamily="34" charset="0"/>
+                <a:ea typeface="Arial" pitchFamily="34" charset="-122"/>
+                <a:cs typeface="Arial" pitchFamily="34" charset="-120"/>
+              </a:rPr>
+              <a:t>aṅka</a:t>
+            </a:r>
+            <a:pPr algn="l" indent="0" marL="0">
+              <a:lnSpc>
+                <a:spcPts val="1620"/>
+              </a:lnSpc>
+              <a:spcAft>
+                <a:spcPts val="300"/>
+              </a:spcAft>
+              <a:buNone/>
+            </a:pPr>
+            <a:r>
+              <a:rPr lang="en-US" sz="1200" dirty="0">
+                <a:solidFill>
+                  <a:srgbClr val="1C2833"/>
+                </a:solidFill>
+                <a:latin typeface="Arial" pitchFamily="34" charset="0"/>
+                <a:ea typeface="Arial" pitchFamily="34" charset="-122"/>
+                <a:cs typeface="Arial" pitchFamily="34" charset="-120"/>
+              </a:rPr>
+              <a:t> — "digit"</a:t>
+            </a:r>
+            <a:endParaRPr lang="en-US" sz="1200" dirty="0"/>
+          </a:p>
+        </p:txBody>
+      </p:sp>
+      <p:sp>
+        <p:nvSpPr>
+          <p:cNvPr id="5" name="Text 3"/>
           <p:cNvSpPr/>
           <p:nvPr/>
         </p:nvSpPr>
@@ -4083,7 +7131,7 @@
                 <a:ea typeface="Georgia" pitchFamily="34" charset="-122"/>
                 <a:cs typeface="Georgia" pitchFamily="34" charset="-120"/>
               </a:rPr>
-              <a:t>Warm-up (5 min)</a:t>
+              <a:t>Flow</a:t>
             </a:r>
             <a:endParaRPr lang="en-US" sz="1800" dirty="0"/>
           </a:p>
@@ -4092,54 +7140,6 @@
       <p:sp>
         <p:nvSpPr>
           <p:cNvPr id="4" name="Text 2"/>
-          <p:cNvSpPr/>
-          <p:nvPr/>
-        </p:nvSpPr>
-        <p:spPr>
-          <a:xfrm>
-            <a:off x="406301" y="870942"/>
-            <a:ext cx="8498026" cy="213271"/>
-          </a:xfrm>
-          <a:prstGeom prst="rect">
-            <a:avLst/>
-          </a:prstGeom>
-          <a:noFill/>
-          <a:ln/>
-        </p:spPr>
-        <p:txBody>
-          <a:bodyPr wrap="square" lIns="0" tIns="0" rIns="0" bIns="0" rtlCol="0" anchor="t"/>
-          <a:lstStyle/>
-          <a:p>
-            <a:pPr algn="l" indent="0" marL="0">
-              <a:lnSpc>
-                <a:spcPts val="1680"/>
-              </a:lnSpc>
-              <a:spcBef>
-                <a:spcPts val="300"/>
-              </a:spcBef>
-              <a:spcAft>
-                <a:spcPts val="300"/>
-              </a:spcAft>
-              <a:buNone/>
-            </a:pPr>
-            <a:r>
-              <a:rPr lang="en-US" sz="1200" dirty="0">
-                <a:solidFill>
-                  <a:srgbClr val="1C2833"/>
-                </a:solidFill>
-                <a:latin typeface="Arial" pitchFamily="34" charset="0"/>
-                <a:ea typeface="Arial" pitchFamily="34" charset="-122"/>
-                <a:cs typeface="Arial" pitchFamily="34" charset="-120"/>
-              </a:rPr>
-              <a:t>Daily prompt + recap: 2 students share one math fact they remember about India from prior knowledge.</a:t>
-            </a:r>
-            <a:endParaRPr lang="en-US" sz="1200" dirty="0"/>
-          </a:p>
-        </p:txBody>
-      </p:sp>
-      <p:sp>
-        <p:nvSpPr>
-          <p:cNvPr id="5" name="Text 3"/>
           <p:cNvSpPr/>
           <p:nvPr/>
         </p:nvSpPr>
@@ -4289,7 +7289,7 @@
                 <a:ea typeface="Georgia" pitchFamily="34" charset="-122"/>
                 <a:cs typeface="Georgia" pitchFamily="34" charset="-120"/>
               </a:rPr>
-              <a:t>Core (25 min)</a:t>
+              <a:t>Warm-up (5 min)</a:t>
             </a:r>
             <a:endParaRPr lang="en-US" sz="1800" dirty="0"/>
           </a:p>
@@ -4303,8 +7303,8 @@
         </p:nvSpPr>
         <p:spPr>
           <a:xfrm>
-            <a:off x="634901" y="883593"/>
-            <a:ext cx="8102798" cy="281880"/>
+            <a:off x="406301" y="870942"/>
+            <a:ext cx="8498026" cy="213271"/>
           </a:xfrm>
           <a:prstGeom prst="rect">
             <a:avLst/>
@@ -4316,18 +7316,20 @@
           <a:bodyPr wrap="square" lIns="0" tIns="0" rIns="0" bIns="0" rtlCol="0" anchor="t"/>
           <a:lstStyle/>
           <a:p>
-            <a:pPr algn="l" marL="342900" indent="-342900">
-              <a:lnSpc>
-                <a:spcPts val="1620"/>
-              </a:lnSpc>
-              <a:spcAft>
-                <a:spcPts val="300"/>
-              </a:spcAft>
-              <a:buSzPct val="100000"/>
-              <a:buChar char="•"/>
-            </a:pPr>
-            <a:r>
-              <a:rPr lang="en-US" sz="1200" b="1" dirty="0">
+            <a:pPr algn="l" indent="0" marL="0">
+              <a:lnSpc>
+                <a:spcPts val="1680"/>
+              </a:lnSpc>
+              <a:spcBef>
+                <a:spcPts val="300"/>
+              </a:spcBef>
+              <a:spcAft>
+                <a:spcPts val="300"/>
+              </a:spcAft>
+              <a:buNone/>
+            </a:pPr>
+            <a:r>
+              <a:rPr lang="en-US" sz="1200" dirty="0">
                 <a:solidFill>
                   <a:srgbClr val="1C2833"/>
                 </a:solidFill>
@@ -4335,7 +7337,7 @@
                 <a:ea typeface="Arial" pitchFamily="34" charset="-122"/>
                 <a:cs typeface="Arial" pitchFamily="34" charset="-120"/>
               </a:rPr>
-              <a:t>Three specific contributions to remember:</a:t>
+              <a:t>Daily prompt + recap: 2 students share one math fact they remember about India from prior knowledge.</a:t>
             </a:r>
             <a:endParaRPr lang="en-US" sz="1200" dirty="0"/>
           </a:p>
@@ -4349,571 +7351,7 @@
         </p:nvSpPr>
         <p:spPr>
           <a:xfrm>
-            <a:off x="406301" y="1254323"/>
-            <a:ext cx="8498026" cy="639812"/>
-          </a:xfrm>
-          <a:prstGeom prst="rect">
-            <a:avLst/>
-          </a:prstGeom>
-          <a:noFill/>
-          <a:ln/>
-        </p:spPr>
-        <p:txBody>
-          <a:bodyPr wrap="square" lIns="0" tIns="0" rIns="0" bIns="0" rtlCol="0" anchor="t"/>
-          <a:lstStyle/>
-          <a:p>
-            <a:pPr algn="l" indent="0" marL="0">
-              <a:lnSpc>
-                <a:spcPts val="1680"/>
-              </a:lnSpc>
-              <a:spcBef>
-                <a:spcPts val="300"/>
-              </a:spcBef>
-              <a:spcAft>
-                <a:spcPts val="300"/>
-              </a:spcAft>
-              <a:buNone/>
-            </a:pPr>
-            <a:r>
-              <a:rPr lang="en-US" sz="1200" b="1" dirty="0">
-                <a:solidFill>
-                  <a:srgbClr val="1C2833"/>
-                </a:solidFill>
-                <a:latin typeface="Arial" pitchFamily="34" charset="0"/>
-                <a:ea typeface="Arial" pitchFamily="34" charset="-122"/>
-                <a:cs typeface="Arial" pitchFamily="34" charset="-120"/>
-              </a:rPr>
-              <a:t>(a) Zero (śūnya) as a number</a:t>
-            </a:r>
-            <a:pPr algn="l" indent="0" marL="0">
-              <a:lnSpc>
-                <a:spcPts val="1680"/>
-              </a:lnSpc>
-              <a:spcBef>
-                <a:spcPts val="300"/>
-              </a:spcBef>
-              <a:spcAft>
-                <a:spcPts val="300"/>
-              </a:spcAft>
-              <a:buNone/>
-            </a:pPr>
-            <a:r>
-              <a:rPr lang="en-US" sz="1200" dirty="0">
-                <a:solidFill>
-                  <a:srgbClr val="1C2833"/>
-                </a:solidFill>
-                <a:latin typeface="Arial" pitchFamily="34" charset="0"/>
-                <a:ea typeface="Arial" pitchFamily="34" charset="-122"/>
-                <a:cs typeface="Arial" pitchFamily="34" charset="-120"/>
-              </a:rPr>
-              <a:t> — Bakhshali manuscript (~7th c. CE — older fragments possibly earlier). Distinct from "zero as placeholder" (which existed earlier in Babylonian and Maya systems). The Indian innovation: zero participates in arithmetic operations (you can add, subtract, multiply, divide... with zero).</a:t>
-            </a:r>
-            <a:endParaRPr lang="en-US" sz="1200" dirty="0"/>
-          </a:p>
-        </p:txBody>
-      </p:sp>
-      <p:sp>
-        <p:nvSpPr>
-          <p:cNvPr id="6" name="Text 4"/>
-          <p:cNvSpPr/>
-          <p:nvPr/>
-        </p:nvSpPr>
-        <p:spPr>
-          <a:xfrm>
-            <a:off x="406301" y="1970336"/>
-            <a:ext cx="8498026" cy="639812"/>
-          </a:xfrm>
-          <a:prstGeom prst="rect">
-            <a:avLst/>
-          </a:prstGeom>
-          <a:noFill/>
-          <a:ln/>
-        </p:spPr>
-        <p:txBody>
-          <a:bodyPr wrap="square" lIns="0" tIns="0" rIns="0" bIns="0" rtlCol="0" anchor="t"/>
-          <a:lstStyle/>
-          <a:p>
-            <a:pPr algn="l" indent="0" marL="0">
-              <a:lnSpc>
-                <a:spcPts val="1680"/>
-              </a:lnSpc>
-              <a:spcBef>
-                <a:spcPts val="300"/>
-              </a:spcBef>
-              <a:spcAft>
-                <a:spcPts val="300"/>
-              </a:spcAft>
-              <a:buNone/>
-            </a:pPr>
-            <a:r>
-              <a:rPr lang="en-US" sz="1200" b="1" dirty="0">
-                <a:solidFill>
-                  <a:srgbClr val="1C2833"/>
-                </a:solidFill>
-                <a:latin typeface="Arial" pitchFamily="34" charset="0"/>
-                <a:ea typeface="Arial" pitchFamily="34" charset="-122"/>
-                <a:cs typeface="Arial" pitchFamily="34" charset="-120"/>
-              </a:rPr>
-              <a:t>(b) Decimal place-value system</a:t>
-            </a:r>
-            <a:pPr algn="l" indent="0" marL="0">
-              <a:lnSpc>
-                <a:spcPts val="1680"/>
-              </a:lnSpc>
-              <a:spcBef>
-                <a:spcPts val="300"/>
-              </a:spcBef>
-              <a:spcAft>
-                <a:spcPts val="300"/>
-              </a:spcAft>
-              <a:buNone/>
-            </a:pPr>
-            <a:r>
-              <a:rPr lang="en-US" sz="1200" dirty="0">
-                <a:solidFill>
-                  <a:srgbClr val="1C2833"/>
-                </a:solidFill>
-                <a:latin typeface="Arial" pitchFamily="34" charset="0"/>
-                <a:ea typeface="Arial" pitchFamily="34" charset="-122"/>
-                <a:cs typeface="Arial" pitchFamily="34" charset="-120"/>
-              </a:rPr>
-              <a:t> — by 6th c. CE the Indian numeral system (with positional values for ones, tens, hundreds, etc.) was in widespread use. Adopted by Arab mathematicians (Al-Khwārizmī, ~825 CE), reached Europe by ~12th c. via Fibonacci (1202 CE).</a:t>
-            </a:r>
-            <a:endParaRPr lang="en-US" sz="1200" dirty="0"/>
-          </a:p>
-        </p:txBody>
-      </p:sp>
-      <p:sp>
-        <p:nvSpPr>
-          <p:cNvPr id="7" name="Text 5"/>
-          <p:cNvSpPr/>
-          <p:nvPr/>
-        </p:nvSpPr>
-        <p:spPr>
-          <a:xfrm>
-            <a:off x="406301" y="2686348"/>
-            <a:ext cx="8498026" cy="639812"/>
-          </a:xfrm>
-          <a:prstGeom prst="rect">
-            <a:avLst/>
-          </a:prstGeom>
-          <a:noFill/>
-          <a:ln/>
-        </p:spPr>
-        <p:txBody>
-          <a:bodyPr wrap="square" lIns="0" tIns="0" rIns="0" bIns="0" rtlCol="0" anchor="t"/>
-          <a:lstStyle/>
-          <a:p>
-            <a:pPr algn="l" indent="0" marL="0">
-              <a:lnSpc>
-                <a:spcPts val="1680"/>
-              </a:lnSpc>
-              <a:spcBef>
-                <a:spcPts val="300"/>
-              </a:spcBef>
-              <a:spcAft>
-                <a:spcPts val="300"/>
-              </a:spcAft>
-              <a:buNone/>
-            </a:pPr>
-            <a:r>
-              <a:rPr lang="en-US" sz="1200" b="1" dirty="0">
-                <a:solidFill>
-                  <a:srgbClr val="1C2833"/>
-                </a:solidFill>
-                <a:latin typeface="Arial" pitchFamily="34" charset="0"/>
-                <a:ea typeface="Arial" pitchFamily="34" charset="-122"/>
-                <a:cs typeface="Arial" pitchFamily="34" charset="-120"/>
-              </a:rPr>
-              <a:t>(c) Infinite series (centuries before Newton)</a:t>
-            </a:r>
-            <a:pPr algn="l" indent="0" marL="0">
-              <a:lnSpc>
-                <a:spcPts val="1680"/>
-              </a:lnSpc>
-              <a:spcBef>
-                <a:spcPts val="300"/>
-              </a:spcBef>
-              <a:spcAft>
-                <a:spcPts val="300"/>
-              </a:spcAft>
-              <a:buNone/>
-            </a:pPr>
-            <a:r>
-              <a:rPr lang="en-US" sz="1200" dirty="0">
-                <a:solidFill>
-                  <a:srgbClr val="1C2833"/>
-                </a:solidFill>
-                <a:latin typeface="Arial" pitchFamily="34" charset="0"/>
-                <a:ea typeface="Arial" pitchFamily="34" charset="-122"/>
-                <a:cs typeface="Arial" pitchFamily="34" charset="-120"/>
-              </a:rPr>
-              <a:t> — Mādhava of Saṅgamagrāma (~14th c. CE, Kerala school) computed infinite series for π, sine, cosine. Specifically: $$\pi = 4 \left(1 - \frac{1}{3} + \frac{1}{5} - \frac{1}{7} + \dots\right)$$ (This is now called the "Leibniz series" but Mādhava had it 300 years earlier.)</a:t>
-            </a:r>
-            <a:endParaRPr lang="en-US" sz="1200" dirty="0"/>
-          </a:p>
-        </p:txBody>
-      </p:sp>
-      <p:sp>
-        <p:nvSpPr>
-          <p:cNvPr id="8" name="Text 6"/>
-          <p:cNvSpPr/>
-          <p:nvPr/>
-        </p:nvSpPr>
-        <p:spPr>
-          <a:xfrm>
-            <a:off x="634901" y="3415010"/>
-            <a:ext cx="8102798" cy="693241"/>
-          </a:xfrm>
-          <a:prstGeom prst="rect">
-            <a:avLst/>
-          </a:prstGeom>
-          <a:noFill/>
-          <a:ln/>
-        </p:spPr>
-        <p:txBody>
-          <a:bodyPr wrap="square" lIns="0" tIns="0" rIns="0" bIns="0" rtlCol="0" anchor="t"/>
-          <a:lstStyle/>
-          <a:p>
-            <a:pPr algn="l" marL="342900" indent="-342900">
-              <a:lnSpc>
-                <a:spcPts val="1620"/>
-              </a:lnSpc>
-              <a:spcAft>
-                <a:spcPts val="300"/>
-              </a:spcAft>
-              <a:buSzPct val="100000"/>
-              <a:buChar char="•"/>
-            </a:pPr>
-            <a:pPr algn="l" indent="0" marL="0">
-              <a:lnSpc>
-                <a:spcPts val="1620"/>
-              </a:lnSpc>
-              <a:spcAft>
-                <a:spcPts val="300"/>
-              </a:spcAft>
-              <a:buNone/>
-            </a:pPr>
-            <a:r>
-              <a:rPr lang="en-US" sz="1200" i="1" dirty="0">
-                <a:solidFill>
-                  <a:srgbClr val="1C2833"/>
-                </a:solidFill>
-                <a:latin typeface="Arial" pitchFamily="34" charset="0"/>
-                <a:ea typeface="Arial" pitchFamily="34" charset="-122"/>
-                <a:cs typeface="Arial" pitchFamily="34" charset="-120"/>
-              </a:rPr>
-              <a:t>A named text — Bhāskara II's</a:t>
-            </a:r>
-            <a:pPr algn="l" indent="0" marL="0">
-              <a:lnSpc>
-                <a:spcPts val="1620"/>
-              </a:lnSpc>
-              <a:spcAft>
-                <a:spcPts val="300"/>
-              </a:spcAft>
-              <a:buNone/>
-            </a:pPr>
-            <a:r>
-              <a:rPr lang="en-US" sz="1200" dirty="0">
-                <a:solidFill>
-                  <a:srgbClr val="1C2833"/>
-                </a:solidFill>
-                <a:latin typeface="Arial" pitchFamily="34" charset="0"/>
-                <a:ea typeface="Arial" pitchFamily="34" charset="-122"/>
-                <a:cs typeface="Arial" pitchFamily="34" charset="-120"/>
-              </a:rPr>
-              <a:t>Līlāvatī</a:t>
-            </a:r>
-            <a:pPr algn="l" indent="0" marL="0">
-              <a:lnSpc>
-                <a:spcPts val="1620"/>
-              </a:lnSpc>
-              <a:spcAft>
-                <a:spcPts val="300"/>
-              </a:spcAft>
-              <a:buNone/>
-            </a:pPr>
-            <a:r>
-              <a:rPr lang="en-US" sz="1200" i="1" dirty="0">
-                <a:solidFill>
-                  <a:srgbClr val="1C2833"/>
-                </a:solidFill>
-                <a:latin typeface="Arial" pitchFamily="34" charset="0"/>
-                <a:ea typeface="Arial" pitchFamily="34" charset="-122"/>
-                <a:cs typeface="Arial" pitchFamily="34" charset="-120"/>
-              </a:rPr>
-              <a:t> (1150 CE).</a:t>
-            </a:r>
-            <a:pPr algn="l" indent="0" marL="0">
-              <a:lnSpc>
-                <a:spcPts val="1620"/>
-              </a:lnSpc>
-              <a:spcAft>
-                <a:spcPts val="300"/>
-              </a:spcAft>
-              <a:buNone/>
-            </a:pPr>
-            <a:r>
-              <a:rPr lang="en-US" sz="1200" dirty="0">
-                <a:solidFill>
-                  <a:srgbClr val="1C2833"/>
-                </a:solidFill>
-                <a:latin typeface="Arial" pitchFamily="34" charset="0"/>
-                <a:ea typeface="Arial" pitchFamily="34" charset="-122"/>
-                <a:cs typeface="Arial" pitchFamily="34" charset="-120"/>
-              </a:rPr>
-              <a:t>* A textbook on arithmetic and algebra written for his daughter (the name "Līlāvatī" is reportedly hers). Includes problems on geometry, sequences, equations, mensuration. Read one short problem aloud (in translation).</a:t>
-            </a:r>
-            <a:endParaRPr lang="en-US" sz="1200" dirty="0"/>
-          </a:p>
-        </p:txBody>
-      </p:sp>
-      <p:sp>
-        <p:nvSpPr>
-          <p:cNvPr id="9" name="Text 7"/>
-          <p:cNvSpPr/>
-          <p:nvPr/>
-        </p:nvSpPr>
-        <p:spPr>
-          <a:xfrm>
-            <a:off x="634901" y="4209752"/>
-            <a:ext cx="8102798" cy="281880"/>
-          </a:xfrm>
-          <a:prstGeom prst="rect">
-            <a:avLst/>
-          </a:prstGeom>
-          <a:noFill/>
-          <a:ln/>
-        </p:spPr>
-        <p:txBody>
-          <a:bodyPr wrap="square" lIns="0" tIns="0" rIns="0" bIns="0" rtlCol="0" anchor="t"/>
-          <a:lstStyle/>
-          <a:p>
-            <a:pPr algn="l" marL="342900" indent="-342900">
-              <a:lnSpc>
-                <a:spcPts val="1620"/>
-              </a:lnSpc>
-              <a:spcAft>
-                <a:spcPts val="300"/>
-              </a:spcAft>
-              <a:buSzPct val="100000"/>
-              <a:buChar char="•"/>
-            </a:pPr>
-            <a:r>
-              <a:rPr lang="en-US" sz="1200" b="1" dirty="0">
-                <a:solidFill>
-                  <a:srgbClr val="1C2833"/>
-                </a:solidFill>
-                <a:latin typeface="Arial" pitchFamily="34" charset="0"/>
-                <a:ea typeface="Arial" pitchFamily="34" charset="-122"/>
-                <a:cs typeface="Arial" pitchFamily="34" charset="-120"/>
-              </a:rPr>
-              <a:t>What modern math doesn't credit Indian sources for (but should):</a:t>
-            </a:r>
-            <a:endParaRPr lang="en-US" sz="1200" dirty="0"/>
-          </a:p>
-        </p:txBody>
-      </p:sp>
-      <p:sp>
-        <p:nvSpPr>
-          <p:cNvPr id="10" name="Text 8"/>
-          <p:cNvSpPr/>
-          <p:nvPr/>
-        </p:nvSpPr>
-        <p:spPr>
-          <a:xfrm>
-            <a:off x="406301" y="4580483"/>
-            <a:ext cx="8498026" cy="426541"/>
-          </a:xfrm>
-          <a:prstGeom prst="rect">
-            <a:avLst/>
-          </a:prstGeom>
-          <a:noFill/>
-          <a:ln/>
-        </p:spPr>
-        <p:txBody>
-          <a:bodyPr wrap="square" lIns="0" tIns="0" rIns="0" bIns="0" rtlCol="0" anchor="t"/>
-          <a:lstStyle/>
-          <a:p>
-            <a:pPr algn="l" indent="0" marL="0">
-              <a:lnSpc>
-                <a:spcPts val="1680"/>
-              </a:lnSpc>
-              <a:spcBef>
-                <a:spcPts val="300"/>
-              </a:spcBef>
-              <a:spcAft>
-                <a:spcPts val="300"/>
-              </a:spcAft>
-              <a:buNone/>
-            </a:pPr>
-            <a:r>
-              <a:rPr lang="en-US" sz="1200" dirty="0">
-                <a:solidFill>
-                  <a:srgbClr val="1C2833"/>
-                </a:solidFill>
-                <a:latin typeface="Arial" pitchFamily="34" charset="0"/>
-                <a:ea typeface="Arial" pitchFamily="34" charset="-122"/>
-                <a:cs typeface="Arial" pitchFamily="34" charset="-120"/>
-              </a:rPr>
-              <a:t>– The number zero as a number (not just placeholder).    – The "Leibniz" series for π (Mādhava had it).    – Several trigonometric identities.</a:t>
-            </a:r>
-            <a:endParaRPr lang="en-US" sz="1200" dirty="0"/>
-          </a:p>
-        </p:txBody>
-      </p:sp>
-      <p:sp>
-        <p:nvSpPr>
-          <p:cNvPr id="11" name="Text 9"/>
-          <p:cNvSpPr/>
-          <p:nvPr/>
-        </p:nvSpPr>
-        <p:spPr>
-          <a:xfrm>
-            <a:off x="634901" y="5095875"/>
-            <a:ext cx="8102798" cy="281880"/>
-          </a:xfrm>
-          <a:prstGeom prst="rect">
-            <a:avLst/>
-          </a:prstGeom>
-          <a:noFill/>
-          <a:ln/>
-        </p:spPr>
-        <p:txBody>
-          <a:bodyPr wrap="square" lIns="0" tIns="0" rIns="0" bIns="0" rtlCol="0" anchor="t"/>
-          <a:lstStyle/>
-          <a:p>
-            <a:pPr algn="l" marL="342900" indent="-342900">
-              <a:lnSpc>
-                <a:spcPts val="1620"/>
-              </a:lnSpc>
-              <a:spcAft>
-                <a:spcPts val="300"/>
-              </a:spcAft>
-              <a:buSzPct val="100000"/>
-              <a:buChar char="•"/>
-            </a:pPr>
-            <a:r>
-              <a:rPr lang="en-US" sz="1200" b="1" dirty="0">
-                <a:solidFill>
-                  <a:srgbClr val="1C2833"/>
-                </a:solidFill>
-                <a:latin typeface="Arial" pitchFamily="34" charset="0"/>
-                <a:ea typeface="Arial" pitchFamily="34" charset="-122"/>
-                <a:cs typeface="Arial" pitchFamily="34" charset="-120"/>
-              </a:rPr>
-              <a:t>What Indian math DIDN'T do:</a:t>
-            </a:r>
-            <a:endParaRPr lang="en-US" sz="1200" dirty="0"/>
-          </a:p>
-        </p:txBody>
-      </p:sp>
-      <p:sp>
-        <p:nvSpPr>
-          <p:cNvPr id="12" name="Text 10"/>
-          <p:cNvSpPr/>
-          <p:nvPr/>
-        </p:nvSpPr>
-        <p:spPr>
-          <a:xfrm>
-            <a:off x="406301" y="5466606"/>
-            <a:ext cx="8498026" cy="426541"/>
-          </a:xfrm>
-          <a:prstGeom prst="rect">
-            <a:avLst/>
-          </a:prstGeom>
-          <a:noFill/>
-          <a:ln/>
-        </p:spPr>
-        <p:txBody>
-          <a:bodyPr wrap="square" lIns="0" tIns="0" rIns="0" bIns="0" rtlCol="0" anchor="t"/>
-          <a:lstStyle/>
-          <a:p>
-            <a:pPr algn="l" indent="0" marL="0">
-              <a:lnSpc>
-                <a:spcPts val="1680"/>
-              </a:lnSpc>
-              <a:spcBef>
-                <a:spcPts val="300"/>
-              </a:spcBef>
-              <a:spcAft>
-                <a:spcPts val="300"/>
-              </a:spcAft>
-              <a:buNone/>
-            </a:pPr>
-            <a:r>
-              <a:rPr lang="en-US" sz="1200" dirty="0">
-                <a:solidFill>
-                  <a:srgbClr val="1C2833"/>
-                </a:solidFill>
-                <a:latin typeface="Arial" pitchFamily="34" charset="0"/>
-                <a:ea typeface="Arial" pitchFamily="34" charset="-122"/>
-                <a:cs typeface="Arial" pitchFamily="34" charset="-120"/>
-              </a:rPr>
-              <a:t>– Did not develop full coordinate geometry (that's Descartes, 17th c. European).    – Did not develop calculus formally (though Mādhava came very close with the series).    – Did not develop modern algebraic notation.</a:t>
-            </a:r>
-            <a:endParaRPr lang="en-US" sz="1200" dirty="0"/>
-          </a:p>
-        </p:txBody>
-      </p:sp>
-      <p:sp>
-        <p:nvSpPr>
-          <p:cNvPr id="13" name="Text 11"/>
-          <p:cNvSpPr/>
-          <p:nvPr/>
-        </p:nvSpPr>
-        <p:spPr>
-          <a:xfrm>
-            <a:off x="406301" y="5969347"/>
-            <a:ext cx="8498026" cy="213271"/>
-          </a:xfrm>
-          <a:prstGeom prst="rect">
-            <a:avLst/>
-          </a:prstGeom>
-          <a:noFill/>
-          <a:ln/>
-        </p:spPr>
-        <p:txBody>
-          <a:bodyPr wrap="square" lIns="0" tIns="0" rIns="0" bIns="0" rtlCol="0" anchor="t"/>
-          <a:lstStyle/>
-          <a:p>
-            <a:pPr algn="l" indent="0" marL="0">
-              <a:lnSpc>
-                <a:spcPts val="1680"/>
-              </a:lnSpc>
-              <a:spcBef>
-                <a:spcPts val="300"/>
-              </a:spcBef>
-              <a:spcAft>
-                <a:spcPts val="300"/>
-              </a:spcAft>
-              <a:buNone/>
-            </a:pPr>
-            <a:r>
-              <a:rPr lang="en-US" sz="1200" dirty="0">
-                <a:solidFill>
-                  <a:srgbClr val="1C2833"/>
-                </a:solidFill>
-                <a:latin typeface="Arial" pitchFamily="34" charset="0"/>
-                <a:ea typeface="Arial" pitchFamily="34" charset="-122"/>
-                <a:cs typeface="Arial" pitchFamily="34" charset="-120"/>
-              </a:rPr>
-              <a:t>Both lists matter for honesty.</a:t>
-            </a:r>
-            <a:endParaRPr lang="en-US" sz="1200" dirty="0"/>
-          </a:p>
-        </p:txBody>
-      </p:sp>
-      <p:sp>
-        <p:nvSpPr>
-          <p:cNvPr id="14" name="Text 12"/>
-          <p:cNvSpPr/>
-          <p:nvPr/>
-        </p:nvSpPr>
-        <p:spPr>
-          <a:xfrm>
-            <a:off x="406301" y="6335018"/>
+            <a:off x="406301" y="4434929"/>
             <a:ext cx="8498026" cy="213271"/>
           </a:xfrm>
           <a:prstGeom prst="rect">
@@ -5057,7 +7495,7 @@
                 <a:ea typeface="Georgia" pitchFamily="34" charset="-122"/>
                 <a:cs typeface="Georgia" pitchFamily="34" charset="-120"/>
               </a:rPr>
-              <a:t>Activity (10 min) — Compute the Mādhava series</a:t>
+              <a:t>Core (25 min)</a:t>
             </a:r>
             <a:endParaRPr lang="en-US" sz="1800" dirty="0"/>
           </a:p>
@@ -5071,8 +7509,8 @@
         </p:nvSpPr>
         <p:spPr>
           <a:xfrm>
-            <a:off x="406301" y="870942"/>
-            <a:ext cx="8498026" cy="426541"/>
+            <a:off x="634901" y="883593"/>
+            <a:ext cx="8102798" cy="281880"/>
           </a:xfrm>
           <a:prstGeom prst="rect">
             <a:avLst/>
@@ -5084,20 +7522,18 @@
           <a:bodyPr wrap="square" lIns="0" tIns="0" rIns="0" bIns="0" rtlCol="0" anchor="t"/>
           <a:lstStyle/>
           <a:p>
-            <a:pPr algn="l" indent="0" marL="0">
-              <a:lnSpc>
-                <a:spcPts val="1680"/>
-              </a:lnSpc>
-              <a:spcBef>
-                <a:spcPts val="300"/>
-              </a:spcBef>
-              <a:spcAft>
-                <a:spcPts val="300"/>
-              </a:spcAft>
-              <a:buNone/>
-            </a:pPr>
-            <a:r>
-              <a:rPr lang="en-US" sz="1200" dirty="0">
+            <a:pPr algn="l" marL="342900" indent="-342900">
+              <a:lnSpc>
+                <a:spcPts val="1620"/>
+              </a:lnSpc>
+              <a:spcAft>
+                <a:spcPts val="300"/>
+              </a:spcAft>
+              <a:buSzPct val="100000"/>
+              <a:buChar char="•"/>
+            </a:pPr>
+            <a:r>
+              <a:rPr lang="en-US" sz="1200" b="1" dirty="0">
                 <a:solidFill>
                   <a:srgbClr val="1C2833"/>
                 </a:solidFill>
@@ -5105,7 +7541,7 @@
                 <a:ea typeface="Arial" pitchFamily="34" charset="-122"/>
                 <a:cs typeface="Arial" pitchFamily="34" charset="-120"/>
               </a:rPr>
-              <a:t>Class together. On the board: – Start at 1. – Subtract 1/3. Add 1/5. Subtract 1/7. Add 1/9. ... – After 4 terms: 1 − 0.333 + 0.2 − 0.143 = 0.724 – Multiply by 4: 2.896 (close to π = 3.14) – After 10 terms it gets closer.</a:t>
+              <a:t>Three specific contributions to remember:</a:t>
             </a:r>
             <a:endParaRPr lang="en-US" sz="1200" dirty="0"/>
           </a:p>
@@ -5119,8 +7555,8 @@
         </p:nvSpPr>
         <p:spPr>
           <a:xfrm>
-            <a:off x="406301" y="1373684"/>
-            <a:ext cx="8498026" cy="426541"/>
+            <a:off x="406301" y="1254323"/>
+            <a:ext cx="8498026" cy="639812"/>
           </a:xfrm>
           <a:prstGeom prst="rect">
             <a:avLst/>
@@ -5145,7 +7581,7 @@
               <a:buNone/>
             </a:pPr>
             <a:r>
-              <a:rPr lang="en-US" sz="1200" dirty="0">
+              <a:rPr lang="en-US" sz="1200" b="1" dirty="0">
                 <a:solidFill>
                   <a:srgbClr val="1C2833"/>
                 </a:solidFill>
@@ -5153,7 +7589,7 @@
                 <a:ea typeface="Arial" pitchFamily="34" charset="-122"/>
                 <a:cs typeface="Arial" pitchFamily="34" charset="-120"/>
               </a:rPr>
-              <a:t>The series converges SLOWLY — that's one reason it wasn't useful as a calculation method. But proving the </a:t>
+              <a:t>(a) Zero (śūnya) as a number</a:t>
             </a:r>
             <a:pPr algn="l" indent="0" marL="0">
               <a:lnSpc>
@@ -5168,7 +7604,7 @@
               <a:buNone/>
             </a:pPr>
             <a:r>
-              <a:rPr lang="en-US" sz="1200" i="1" dirty="0">
+              <a:rPr lang="en-US" sz="1200" dirty="0">
                 <a:solidFill>
                   <a:srgbClr val="1C2833"/>
                 </a:solidFill>
@@ -5176,30 +7612,7 @@
                 <a:ea typeface="Arial" pitchFamily="34" charset="-122"/>
                 <a:cs typeface="Arial" pitchFamily="34" charset="-120"/>
               </a:rPr>
-              <a:t>form</a:t>
-            </a:r>
-            <a:pPr algn="l" indent="0" marL="0">
-              <a:lnSpc>
-                <a:spcPts val="1680"/>
-              </a:lnSpc>
-              <a:spcBef>
-                <a:spcPts val="300"/>
-              </a:spcBef>
-              <a:spcAft>
-                <a:spcPts val="300"/>
-              </a:spcAft>
-              <a:buNone/>
-            </a:pPr>
-            <a:r>
-              <a:rPr lang="en-US" sz="1200" dirty="0">
-                <a:solidFill>
-                  <a:srgbClr val="1C2833"/>
-                </a:solidFill>
-                <a:latin typeface="Arial" pitchFamily="34" charset="0"/>
-                <a:ea typeface="Arial" pitchFamily="34" charset="-122"/>
-                <a:cs typeface="Arial" pitchFamily="34" charset="-120"/>
-              </a:rPr>
-              <a:t> was a huge mathematical achievement.</a:t>
+              <a:t> — Bakhshali manuscript (~7th c. CE — older fragments possibly earlier). Distinct from "zero as placeholder" (which existed earlier in Babylonian and Maya systems). The Indian innovation: zero participates in arithmetic operations (you can add, subtract, multiply, divide... with zero).</a:t>
             </a:r>
             <a:endParaRPr lang="en-US" sz="1200" dirty="0"/>
           </a:p>
@@ -5357,7 +7770,7 @@
                 <a:ea typeface="Georgia" pitchFamily="34" charset="-122"/>
                 <a:cs typeface="Georgia" pitchFamily="34" charset="-120"/>
               </a:rPr>
-              <a:t>Wrap-up (5 min)</a:t>
+              <a:t>Core (25 min) (cont.)</a:t>
             </a:r>
             <a:endParaRPr lang="en-US" sz="1800" dirty="0"/>
           </a:p>
@@ -5372,7 +7785,7 @@
         <p:spPr>
           <a:xfrm>
             <a:off x="406301" y="870942"/>
-            <a:ext cx="8498026" cy="213271"/>
+            <a:ext cx="8498026" cy="639812"/>
           </a:xfrm>
           <a:prstGeom prst="rect">
             <a:avLst/>
@@ -5397,7 +7810,7 @@
               <a:buNone/>
             </a:pPr>
             <a:r>
-              <a:rPr lang="en-US" sz="1200" dirty="0">
+              <a:rPr lang="en-US" sz="1200" b="1" dirty="0">
                 <a:solidFill>
                   <a:srgbClr val="1C2833"/>
                 </a:solidFill>
@@ -5405,7 +7818,7 @@
                 <a:ea typeface="Arial" pitchFamily="34" charset="-122"/>
                 <a:cs typeface="Arial" pitchFamily="34" charset="-120"/>
               </a:rPr>
-              <a:t>– Preview Day 7: </a:t>
+              <a:t>(b) Decimal place-value system</a:t>
             </a:r>
             <a:pPr algn="l" indent="0" marL="0">
               <a:lnSpc>
@@ -5420,7 +7833,7 @@
               <a:buNone/>
             </a:pPr>
             <a:r>
-              <a:rPr lang="en-US" sz="1200" i="1" dirty="0">
+              <a:rPr lang="en-US" sz="1200" dirty="0">
                 <a:solidFill>
                   <a:srgbClr val="1C2833"/>
                 </a:solidFill>
@@ -5428,7 +7841,7 @@
                 <a:ea typeface="Arial" pitchFamily="34" charset="-122"/>
                 <a:cs typeface="Arial" pitchFamily="34" charset="-120"/>
               </a:rPr>
-              <a:t>"Tomorrow — Indian astronomy. Aryabhata."</a:t>
+              <a:t> — by 6th c. CE the Indian numeral system (with positional values for ones, tens, hundreds, etc.) was in widespread use. Adopted by Arab mathematicians (Al-Khwārizmī, ~825 CE), reached Europe by ~12th c. via Fibonacci (1202 CE).</a:t>
             </a:r>
             <a:endParaRPr lang="en-US" sz="1200" dirty="0"/>
           </a:p>
@@ -5586,7 +7999,7 @@
                 <a:ea typeface="Georgia" pitchFamily="34" charset="-122"/>
                 <a:cs typeface="Georgia" pitchFamily="34" charset="-120"/>
               </a:rPr>
-              <a:t>Student-facing content</a:t>
+              <a:t>Core (25 min) (cont.)</a:t>
             </a:r>
             <a:endParaRPr lang="en-US" sz="1800" dirty="0"/>
           </a:p>
@@ -5600,66 +8013,13 @@
         </p:nvSpPr>
         <p:spPr>
           <a:xfrm>
-            <a:off x="406301" y="883593"/>
-            <a:ext cx="8331398" cy="2150269"/>
-          </a:xfrm>
-          <a:prstGeom prst="rect">
-            <a:avLst/>
-          </a:prstGeom>
-          <a:solidFill>
-            <a:srgbClr val="F4F8F9"/>
-          </a:solidFill>
-          <a:ln/>
-        </p:spPr>
-        <p:txBody>
-          <a:bodyPr wrap="square" rtlCol="0" anchor="ctr"/>
-          <a:lstStyle/>
-          <a:p>
-            <a:pPr indent="0" marL="0">
-              <a:buNone/>
-            </a:pPr>
-            <a:endParaRPr lang="en-US" dirty="0"/>
-          </a:p>
-        </p:txBody>
-      </p:sp>
-      <p:sp>
-        <p:nvSpPr>
-          <p:cNvPr id="5" name="Shape 3"/>
-          <p:cNvSpPr/>
-          <p:nvPr/>
-        </p:nvSpPr>
-        <p:spPr>
-          <a:xfrm>
-            <a:off x="434876" y="883593"/>
-            <a:ext cx="0" cy="2150269"/>
-          </a:xfrm>
-          <a:prstGeom prst="line">
+            <a:off x="406301" y="870942"/>
+            <a:ext cx="8498026" cy="639812"/>
+          </a:xfrm>
+          <a:prstGeom prst="rect">
             <a:avLst/>
           </a:prstGeom>
           <a:noFill/>
-          <a:ln w="57150">
-            <a:solidFill>
-              <a:srgbClr val="FE4447"/>
-            </a:solidFill>
-            <a:prstDash val="solid"/>
-          </a:ln>
-        </p:spPr>
-      </p:sp>
-      <p:sp>
-        <p:nvSpPr>
-          <p:cNvPr id="6" name="Text 4"/>
-          <p:cNvSpPr/>
-          <p:nvPr/>
-        </p:nvSpPr>
-        <p:spPr>
-          <a:xfrm>
-            <a:off x="692051" y="1074093"/>
-            <a:ext cx="7973389" cy="230981"/>
-          </a:xfrm>
-          <a:prstGeom prst="rect">
-            <a:avLst/>
-          </a:prstGeom>
-          <a:noFill/>
           <a:ln/>
         </p:spPr>
         <p:txBody>
@@ -5668,7 +8028,7 @@
           <a:p>
             <a:pPr algn="l" indent="0" marL="0">
               <a:lnSpc>
-                <a:spcPts val="1820"/>
+                <a:spcPts val="1680"/>
               </a:lnSpc>
               <a:spcBef>
                 <a:spcPts val="300"/>
@@ -5679,44 +8039,19 @@
               <a:buNone/>
             </a:pPr>
             <a:r>
-              <a:rPr lang="en-US" sz="1300" b="1" i="1" dirty="0">
-                <a:solidFill>
-                  <a:srgbClr val="1C2833"/>
-                </a:solidFill>
-                <a:latin typeface="Georgia" pitchFamily="34" charset="0"/>
-                <a:ea typeface="Georgia" pitchFamily="34" charset="-122"/>
-                <a:cs typeface="Georgia" pitchFamily="34" charset="-120"/>
-              </a:rPr>
-              <a:t>Three Indian Mathematical Contributions</a:t>
-            </a:r>
-            <a:endParaRPr lang="en-US" sz="1300" dirty="0"/>
-          </a:p>
-        </p:txBody>
-      </p:sp>
-      <p:sp>
-        <p:nvSpPr>
-          <p:cNvPr id="7" name="Text 5"/>
-          <p:cNvSpPr/>
-          <p:nvPr/>
-        </p:nvSpPr>
-        <p:spPr>
-          <a:xfrm>
-            <a:off x="692051" y="1343174"/>
-            <a:ext cx="7973389" cy="692944"/>
-          </a:xfrm>
-          <a:prstGeom prst="rect">
-            <a:avLst/>
-          </a:prstGeom>
-          <a:noFill/>
-          <a:ln/>
-        </p:spPr>
-        <p:txBody>
-          <a:bodyPr wrap="square" lIns="0" tIns="0" rIns="0" bIns="0" rtlCol="0" anchor="t"/>
-          <a:lstStyle/>
-          <a:p>
+              <a:rPr lang="en-US" sz="1200" b="1" dirty="0">
+                <a:solidFill>
+                  <a:srgbClr val="1C2833"/>
+                </a:solidFill>
+                <a:latin typeface="Arial" pitchFamily="34" charset="0"/>
+                <a:ea typeface="Arial" pitchFamily="34" charset="-122"/>
+                <a:cs typeface="Arial" pitchFamily="34" charset="-120"/>
+              </a:rPr>
+              <a:t>(c) Infinite series (centuries before Newton)</a:t>
+            </a:r>
             <a:pPr algn="l" indent="0" marL="0">
               <a:lnSpc>
-                <a:spcPts val="1820"/>
+                <a:spcPts val="1680"/>
               </a:lnSpc>
               <a:spcBef>
                 <a:spcPts val="300"/>
@@ -5727,351 +8062,23 @@
               <a:buNone/>
             </a:pPr>
             <a:r>
-              <a:rPr lang="en-US" sz="1300" dirty="0">
-                <a:solidFill>
-                  <a:srgbClr val="1C2833"/>
-                </a:solidFill>
-                <a:latin typeface="Georgia" pitchFamily="34" charset="0"/>
-                <a:ea typeface="Georgia" pitchFamily="34" charset="-122"/>
-                <a:cs typeface="Georgia" pitchFamily="34" charset="-120"/>
-              </a:rPr>
-              <a:t>1. </a:t>
-            </a:r>
-            <a:pPr algn="l" indent="0" marL="0">
-              <a:lnSpc>
-                <a:spcPts val="1820"/>
-              </a:lnSpc>
-              <a:spcBef>
-                <a:spcPts val="300"/>
-              </a:spcBef>
-              <a:spcAft>
-                <a:spcPts val="300"/>
-              </a:spcAft>
-              <a:buNone/>
-            </a:pPr>
-            <a:r>
-              <a:rPr lang="en-US" sz="1300" b="1" i="1" dirty="0">
-                <a:solidFill>
-                  <a:srgbClr val="1C2833"/>
-                </a:solidFill>
-                <a:latin typeface="Georgia" pitchFamily="34" charset="0"/>
-                <a:ea typeface="Georgia" pitchFamily="34" charset="-122"/>
-                <a:cs typeface="Georgia" pitchFamily="34" charset="-120"/>
-              </a:rPr>
-              <a:t>Zero as a number</a:t>
-            </a:r>
-            <a:pPr algn="l" indent="0" marL="0">
-              <a:lnSpc>
-                <a:spcPts val="1820"/>
-              </a:lnSpc>
-              <a:spcBef>
-                <a:spcPts val="300"/>
-              </a:spcBef>
-              <a:spcAft>
-                <a:spcPts val="300"/>
-              </a:spcAft>
-              <a:buNone/>
-            </a:pPr>
-            <a:r>
-              <a:rPr lang="en-US" sz="1300" dirty="0">
-                <a:solidFill>
-                  <a:srgbClr val="1C2833"/>
-                </a:solidFill>
-                <a:latin typeface="Georgia" pitchFamily="34" charset="0"/>
-                <a:ea typeface="Georgia" pitchFamily="34" charset="-122"/>
-                <a:cs typeface="Georgia" pitchFamily="34" charset="-120"/>
-              </a:rPr>
-              <a:t> — Bakhshali manuscript, ~7th c. CE. 2. </a:t>
-            </a:r>
-            <a:pPr algn="l" indent="0" marL="0">
-              <a:lnSpc>
-                <a:spcPts val="1820"/>
-              </a:lnSpc>
-              <a:spcBef>
-                <a:spcPts val="300"/>
-              </a:spcBef>
-              <a:spcAft>
-                <a:spcPts val="300"/>
-              </a:spcAft>
-              <a:buNone/>
-            </a:pPr>
-            <a:r>
-              <a:rPr lang="en-US" sz="1300" b="1" i="1" dirty="0">
-                <a:solidFill>
-                  <a:srgbClr val="1C2833"/>
-                </a:solidFill>
-                <a:latin typeface="Georgia" pitchFamily="34" charset="0"/>
-                <a:ea typeface="Georgia" pitchFamily="34" charset="-122"/>
-                <a:cs typeface="Georgia" pitchFamily="34" charset="-120"/>
-              </a:rPr>
-              <a:t>Decimal place-value system</a:t>
-            </a:r>
-            <a:pPr algn="l" indent="0" marL="0">
-              <a:lnSpc>
-                <a:spcPts val="1820"/>
-              </a:lnSpc>
-              <a:spcBef>
-                <a:spcPts val="300"/>
-              </a:spcBef>
-              <a:spcAft>
-                <a:spcPts val="300"/>
-              </a:spcAft>
-              <a:buNone/>
-            </a:pPr>
-            <a:r>
-              <a:rPr lang="en-US" sz="1300" dirty="0">
-                <a:solidFill>
-                  <a:srgbClr val="1C2833"/>
-                </a:solidFill>
-                <a:latin typeface="Georgia" pitchFamily="34" charset="0"/>
-                <a:ea typeface="Georgia" pitchFamily="34" charset="-122"/>
-                <a:cs typeface="Georgia" pitchFamily="34" charset="-120"/>
-              </a:rPr>
-              <a:t> — by 6th c. CE; adopted by Arab mathematicians (~825 CE); reached Europe (~12th c.). 3. </a:t>
-            </a:r>
-            <a:pPr algn="l" indent="0" marL="0">
-              <a:lnSpc>
-                <a:spcPts val="1820"/>
-              </a:lnSpc>
-              <a:spcBef>
-                <a:spcPts val="300"/>
-              </a:spcBef>
-              <a:spcAft>
-                <a:spcPts val="300"/>
-              </a:spcAft>
-              <a:buNone/>
-            </a:pPr>
-            <a:r>
-              <a:rPr lang="en-US" sz="1300" b="1" i="1" dirty="0">
-                <a:solidFill>
-                  <a:srgbClr val="1C2833"/>
-                </a:solidFill>
-                <a:latin typeface="Georgia" pitchFamily="34" charset="0"/>
-                <a:ea typeface="Georgia" pitchFamily="34" charset="-122"/>
-                <a:cs typeface="Georgia" pitchFamily="34" charset="-120"/>
-              </a:rPr>
-              <a:t>Infinite series for π</a:t>
-            </a:r>
-            <a:pPr algn="l" indent="0" marL="0">
-              <a:lnSpc>
-                <a:spcPts val="1820"/>
-              </a:lnSpc>
-              <a:spcBef>
-                <a:spcPts val="300"/>
-              </a:spcBef>
-              <a:spcAft>
-                <a:spcPts val="300"/>
-              </a:spcAft>
-              <a:buNone/>
-            </a:pPr>
-            <a:r>
-              <a:rPr lang="en-US" sz="1300" dirty="0">
-                <a:solidFill>
-                  <a:srgbClr val="1C2833"/>
-                </a:solidFill>
-                <a:latin typeface="Georgia" pitchFamily="34" charset="0"/>
-                <a:ea typeface="Georgia" pitchFamily="34" charset="-122"/>
-                <a:cs typeface="Georgia" pitchFamily="34" charset="-120"/>
-              </a:rPr>
-              <a:t> — Mādhava of Saṅgamagrāma, ~14th c. CE.</a:t>
-            </a:r>
-            <a:endParaRPr lang="en-US" sz="1300" dirty="0"/>
-          </a:p>
-        </p:txBody>
-      </p:sp>
-      <p:sp>
-        <p:nvSpPr>
-          <p:cNvPr id="8" name="Text 6"/>
-          <p:cNvSpPr/>
-          <p:nvPr/>
-        </p:nvSpPr>
-        <p:spPr>
-          <a:xfrm>
-            <a:off x="692051" y="2074218"/>
-            <a:ext cx="7973389" cy="230981"/>
-          </a:xfrm>
-          <a:prstGeom prst="rect">
-            <a:avLst/>
-          </a:prstGeom>
-          <a:noFill/>
-          <a:ln/>
-        </p:spPr>
-        <p:txBody>
-          <a:bodyPr wrap="square" lIns="0" tIns="0" rIns="0" bIns="0" rtlCol="0" anchor="t"/>
-          <a:lstStyle/>
-          <a:p>
-            <a:pPr algn="l" indent="0" marL="0">
-              <a:lnSpc>
-                <a:spcPts val="1820"/>
-              </a:lnSpc>
-              <a:spcBef>
-                <a:spcPts val="300"/>
-              </a:spcBef>
-              <a:spcAft>
-                <a:spcPts val="300"/>
-              </a:spcAft>
-              <a:buNone/>
-            </a:pPr>
-            <a:r>
-              <a:rPr lang="en-US" sz="1300" i="1" dirty="0">
-                <a:solidFill>
-                  <a:srgbClr val="1C2833"/>
-                </a:solidFill>
-                <a:latin typeface="Georgia" pitchFamily="34" charset="0"/>
-                <a:ea typeface="Georgia" pitchFamily="34" charset="-122"/>
-                <a:cs typeface="Georgia" pitchFamily="34" charset="-120"/>
-              </a:rPr>
-              <a:t>$$\pi = 4 \left(1 - \frac{1}{3} + \frac{1}{5} - \frac{1}{7} + \dots\right)$$</a:t>
-            </a:r>
-            <a:endParaRPr lang="en-US" sz="1300" dirty="0"/>
-          </a:p>
-        </p:txBody>
-      </p:sp>
-      <p:sp>
-        <p:nvSpPr>
-          <p:cNvPr id="9" name="Text 7"/>
-          <p:cNvSpPr/>
-          <p:nvPr/>
-        </p:nvSpPr>
-        <p:spPr>
-          <a:xfrm>
-            <a:off x="692051" y="2343299"/>
-            <a:ext cx="7973389" cy="230981"/>
-          </a:xfrm>
-          <a:prstGeom prst="rect">
-            <a:avLst/>
-          </a:prstGeom>
-          <a:noFill/>
-          <a:ln/>
-        </p:spPr>
-        <p:txBody>
-          <a:bodyPr wrap="square" lIns="0" tIns="0" rIns="0" bIns="0" rtlCol="0" anchor="t"/>
-          <a:lstStyle/>
-          <a:p>
-            <a:pPr algn="l" indent="0" marL="0">
-              <a:lnSpc>
-                <a:spcPts val="1820"/>
-              </a:lnSpc>
-              <a:spcBef>
-                <a:spcPts val="300"/>
-              </a:spcBef>
-              <a:spcAft>
-                <a:spcPts val="300"/>
-              </a:spcAft>
-              <a:buNone/>
-            </a:pPr>
-            <a:r>
-              <a:rPr lang="en-US" sz="1300" i="1" dirty="0">
-                <a:solidFill>
-                  <a:srgbClr val="1C2833"/>
-                </a:solidFill>
-                <a:latin typeface="Georgia" pitchFamily="34" charset="0"/>
-                <a:ea typeface="Georgia" pitchFamily="34" charset="-122"/>
-                <a:cs typeface="Georgia" pitchFamily="34" charset="-120"/>
-              </a:rPr>
-              <a:t>(Now sometimes called the "Leibniz series" — Mādhava had it ~300 years before Leibniz.)</a:t>
-            </a:r>
-            <a:endParaRPr lang="en-US" sz="1300" dirty="0"/>
-          </a:p>
-        </p:txBody>
-      </p:sp>
-      <p:sp>
-        <p:nvSpPr>
-          <p:cNvPr id="10" name="Text 8"/>
-          <p:cNvSpPr/>
-          <p:nvPr/>
-        </p:nvSpPr>
-        <p:spPr>
-          <a:xfrm>
-            <a:off x="692051" y="2612380"/>
-            <a:ext cx="7973389" cy="230981"/>
-          </a:xfrm>
-          <a:prstGeom prst="rect">
-            <a:avLst/>
-          </a:prstGeom>
-          <a:noFill/>
-          <a:ln/>
-        </p:spPr>
-        <p:txBody>
-          <a:bodyPr wrap="square" lIns="0" tIns="0" rIns="0" bIns="0" rtlCol="0" anchor="t"/>
-          <a:lstStyle/>
-          <a:p>
-            <a:pPr algn="l" indent="0" marL="0">
-              <a:lnSpc>
-                <a:spcPts val="1820"/>
-              </a:lnSpc>
-              <a:spcBef>
-                <a:spcPts val="300"/>
-              </a:spcBef>
-              <a:spcAft>
-                <a:spcPts val="300"/>
-              </a:spcAft>
-              <a:buNone/>
-            </a:pPr>
-            <a:r>
-              <a:rPr lang="en-US" sz="1300" dirty="0">
-                <a:solidFill>
-                  <a:srgbClr val="1C2833"/>
-                </a:solidFill>
-                <a:latin typeface="Georgia" pitchFamily="34" charset="0"/>
-                <a:ea typeface="Georgia" pitchFamily="34" charset="-122"/>
-                <a:cs typeface="Georgia" pitchFamily="34" charset="-120"/>
-              </a:rPr>
-              <a:t>A named text: *</a:t>
-            </a:r>
-            <a:pPr algn="l" indent="0" marL="0">
-              <a:lnSpc>
-                <a:spcPts val="1820"/>
-              </a:lnSpc>
-              <a:spcBef>
-                <a:spcPts val="300"/>
-              </a:spcBef>
-              <a:spcAft>
-                <a:spcPts val="300"/>
-              </a:spcAft>
-              <a:buNone/>
-            </a:pPr>
-            <a:r>
-              <a:rPr lang="en-US" sz="1300" i="1" dirty="0">
-                <a:solidFill>
-                  <a:srgbClr val="1C2833"/>
-                </a:solidFill>
-                <a:latin typeface="Georgia" pitchFamily="34" charset="0"/>
-                <a:ea typeface="Georgia" pitchFamily="34" charset="-122"/>
-                <a:cs typeface="Georgia" pitchFamily="34" charset="-120"/>
-              </a:rPr>
-              <a:t>Bhāskara II's</a:t>
-            </a:r>
-            <a:pPr algn="l" indent="0" marL="0">
-              <a:lnSpc>
-                <a:spcPts val="1820"/>
-              </a:lnSpc>
-              <a:spcBef>
-                <a:spcPts val="300"/>
-              </a:spcBef>
-              <a:spcAft>
-                <a:spcPts val="300"/>
-              </a:spcAft>
-              <a:buNone/>
-            </a:pPr>
-            <a:r>
-              <a:rPr lang="en-US" sz="1300" dirty="0">
-                <a:solidFill>
-                  <a:srgbClr val="1C2833"/>
-                </a:solidFill>
-                <a:latin typeface="Georgia" pitchFamily="34" charset="0"/>
-                <a:ea typeface="Georgia" pitchFamily="34" charset="-122"/>
-                <a:cs typeface="Georgia" pitchFamily="34" charset="-120"/>
-              </a:rPr>
-              <a:t>Līlāvatī*** (1150 CE).</a:t>
-            </a:r>
-            <a:endParaRPr lang="en-US" sz="1300" dirty="0"/>
-          </a:p>
-        </p:txBody>
-      </p:sp>
-      <p:sp>
-        <p:nvSpPr>
-          <p:cNvPr id="11" name="Text 9"/>
+              <a:rPr lang="en-US" sz="1200" dirty="0">
+                <a:solidFill>
+                  <a:srgbClr val="1C2833"/>
+                </a:solidFill>
+                <a:latin typeface="Arial" pitchFamily="34" charset="0"/>
+                <a:ea typeface="Arial" pitchFamily="34" charset="-122"/>
+                <a:cs typeface="Arial" pitchFamily="34" charset="-120"/>
+              </a:rPr>
+              <a:t> — Mādhava of Saṅgamagrāma (~14th c. CE, Kerala school) computed infinite series for π, sine, cosine. Specifically: $$\pi = 4 \left(1 - \frac{1}{3} + \frac{1}{5} - \frac{1}{7} + \dots\right)$$ (This is now called the "Leibniz series" but Mādhava had it 300 years earlier.)</a:t>
+            </a:r>
+            <a:endParaRPr lang="en-US" sz="1200" dirty="0"/>
+          </a:p>
+        </p:txBody>
+      </p:sp>
+      <p:sp>
+        <p:nvSpPr>
+          <p:cNvPr id="5" name="Text 3"/>
           <p:cNvSpPr/>
           <p:nvPr/>
         </p:nvSpPr>
